--- a/Python/Lesson 04 - Strings, Advanced Functions, and Virtual Environments/Lesson 04 - Strings, Virtual Environments, and Advanced Functions.pptx
+++ b/Python/Lesson 04 - Strings, Advanced Functions, and Virtual Environments/Lesson 04 - Strings, Virtual Environments, and Advanced Functions.pptx
@@ -5,7 +5,7 @@
     <p:sldMasterId id="2147483684" r:id="rId1"/>
   </p:sldMasterIdLst>
   <p:notesMasterIdLst>
-    <p:notesMasterId r:id="rId22"/>
+    <p:notesMasterId r:id="rId28"/>
   </p:notesMasterIdLst>
   <p:sldIdLst>
     <p:sldId id="256" r:id="rId2"/>
@@ -27,17 +27,23 @@
     <p:sldId id="494" r:id="rId18"/>
     <p:sldId id="433" r:id="rId19"/>
     <p:sldId id="501" r:id="rId20"/>
-    <p:sldId id="476" r:id="rId21"/>
+    <p:sldId id="510" r:id="rId21"/>
+    <p:sldId id="511" r:id="rId22"/>
+    <p:sldId id="512" r:id="rId23"/>
+    <p:sldId id="513" r:id="rId24"/>
+    <p:sldId id="514" r:id="rId25"/>
+    <p:sldId id="515" r:id="rId26"/>
+    <p:sldId id="476" r:id="rId27"/>
   </p:sldIdLst>
   <p:sldSz cx="9144000" cy="5143500" type="screen16x9"/>
   <p:notesSz cx="6858000" cy="9144000"/>
   <p:embeddedFontLst>
     <p:embeddedFont>
       <p:font typeface="Roboto" panose="02000000000000000000" pitchFamily="2" charset="0"/>
-      <p:regular r:id="rId23"/>
-      <p:bold r:id="rId24"/>
-      <p:italic r:id="rId25"/>
-      <p:boldItalic r:id="rId26"/>
+      <p:regular r:id="rId29"/>
+      <p:bold r:id="rId30"/>
+      <p:italic r:id="rId31"/>
+      <p:boldItalic r:id="rId32"/>
     </p:embeddedFont>
   </p:embeddedFontLst>
   <p:defaultTextStyle>
@@ -2339,6 +2345,732 @@
   <p:cSld>
     <p:spTree>
       <p:nvGrpSpPr>
+        <p:cNvPr id="1" name="">
+          <a:extLst>
+            <a:ext uri="{FF2B5EF4-FFF2-40B4-BE49-F238E27FC236}">
+              <a16:creationId xmlns:a16="http://schemas.microsoft.com/office/drawing/2014/main" id="{9CC31425-54C9-1153-5689-F47A93C40AA0}"/>
+            </a:ext>
+          </a:extLst>
+        </p:cNvPr>
+        <p:cNvGrpSpPr/>
+        <p:nvPr/>
+      </p:nvGrpSpPr>
+      <p:grpSpPr>
+        <a:xfrm>
+          <a:off x="0" y="0"/>
+          <a:ext cx="0" cy="0"/>
+          <a:chOff x="0" y="0"/>
+          <a:chExt cx="0" cy="0"/>
+        </a:xfrm>
+      </p:grpSpPr>
+      <p:sp>
+        <p:nvSpPr>
+          <p:cNvPr id="2" name="Slide Image Placeholder 1">
+            <a:extLst>
+              <a:ext uri="{FF2B5EF4-FFF2-40B4-BE49-F238E27FC236}">
+                <a16:creationId xmlns:a16="http://schemas.microsoft.com/office/drawing/2014/main" id="{022AE665-8EA2-6666-D626-64A964CB738C}"/>
+              </a:ext>
+            </a:extLst>
+          </p:cNvPr>
+          <p:cNvSpPr>
+            <a:spLocks noGrp="1" noRot="1" noChangeAspect="1"/>
+          </p:cNvSpPr>
+          <p:nvPr>
+            <p:ph type="sldImg"/>
+          </p:nvPr>
+        </p:nvSpPr>
+        <p:spPr>
+          <a:xfrm>
+            <a:off x="381000" y="685800"/>
+            <a:ext cx="6096000" cy="3429000"/>
+          </a:xfrm>
+        </p:spPr>
+      </p:sp>
+      <p:sp>
+        <p:nvSpPr>
+          <p:cNvPr id="3" name="Notes Placeholder 2">
+            <a:extLst>
+              <a:ext uri="{FF2B5EF4-FFF2-40B4-BE49-F238E27FC236}">
+                <a16:creationId xmlns:a16="http://schemas.microsoft.com/office/drawing/2014/main" id="{4B7FFCD6-7183-6F41-E9AE-DD89AC8EA75E}"/>
+              </a:ext>
+            </a:extLst>
+          </p:cNvPr>
+          <p:cNvSpPr>
+            <a:spLocks noGrp="1"/>
+          </p:cNvSpPr>
+          <p:nvPr>
+            <p:ph type="body" idx="1"/>
+          </p:nvPr>
+        </p:nvSpPr>
+        <p:spPr/>
+        <p:txBody>
+          <a:bodyPr>
+            <a:normAutofit/>
+          </a:bodyPr>
+          <a:lstStyle/>
+          <a:p>
+            <a:endParaRPr lang="en-US" dirty="0"/>
+          </a:p>
+        </p:txBody>
+      </p:sp>
+      <p:sp>
+        <p:nvSpPr>
+          <p:cNvPr id="4" name="Slide Number Placeholder 3">
+            <a:extLst>
+              <a:ext uri="{FF2B5EF4-FFF2-40B4-BE49-F238E27FC236}">
+                <a16:creationId xmlns:a16="http://schemas.microsoft.com/office/drawing/2014/main" id="{B33A06C6-06D4-1DC2-1249-1520114D8534}"/>
+              </a:ext>
+            </a:extLst>
+          </p:cNvPr>
+          <p:cNvSpPr>
+            <a:spLocks noGrp="1"/>
+          </p:cNvSpPr>
+          <p:nvPr>
+            <p:ph type="sldNum" sz="quarter" idx="5"/>
+          </p:nvPr>
+        </p:nvSpPr>
+        <p:spPr/>
+        <p:txBody>
+          <a:bodyPr/>
+          <a:lstStyle/>
+          <a:p>
+            <a:pPr>
+              <a:defRPr/>
+            </a:pPr>
+            <a:fld id="{18B4ECCA-5441-478E-8672-6AB21BB71BD9}" type="slidenum">
+              <a:rPr lang="en-US" altLang="en-US" smtClean="0"/>
+              <a:pPr>
+                <a:defRPr/>
+              </a:pPr>
+              <a:t>20</a:t>
+            </a:fld>
+            <a:endParaRPr lang="en-US" altLang="en-US"/>
+          </a:p>
+        </p:txBody>
+      </p:sp>
+    </p:spTree>
+    <p:extLst>
+      <p:ext uri="{BB962C8B-B14F-4D97-AF65-F5344CB8AC3E}">
+        <p14:creationId xmlns:p14="http://schemas.microsoft.com/office/powerpoint/2010/main" val="708666650"/>
+      </p:ext>
+    </p:extLst>
+  </p:cSld>
+  <p:clrMapOvr>
+    <a:masterClrMapping/>
+  </p:clrMapOvr>
+</p:notes>
+</file>
+
+<file path=ppt/notesSlides/notesSlide21.xml><?xml version="1.0" encoding="utf-8"?>
+<p:notes xmlns:a="http://schemas.openxmlformats.org/drawingml/2006/main" xmlns:r="http://schemas.openxmlformats.org/officeDocument/2006/relationships" xmlns:p="http://schemas.openxmlformats.org/presentationml/2006/main">
+  <p:cSld>
+    <p:spTree>
+      <p:nvGrpSpPr>
+        <p:cNvPr id="1" name="">
+          <a:extLst>
+            <a:ext uri="{FF2B5EF4-FFF2-40B4-BE49-F238E27FC236}">
+              <a16:creationId xmlns:a16="http://schemas.microsoft.com/office/drawing/2014/main" id="{6C58A1B2-85FA-B0A5-F422-5F22667C6F78}"/>
+            </a:ext>
+          </a:extLst>
+        </p:cNvPr>
+        <p:cNvGrpSpPr/>
+        <p:nvPr/>
+      </p:nvGrpSpPr>
+      <p:grpSpPr>
+        <a:xfrm>
+          <a:off x="0" y="0"/>
+          <a:ext cx="0" cy="0"/>
+          <a:chOff x="0" y="0"/>
+          <a:chExt cx="0" cy="0"/>
+        </a:xfrm>
+      </p:grpSpPr>
+      <p:sp>
+        <p:nvSpPr>
+          <p:cNvPr id="2" name="Slide Image Placeholder 1">
+            <a:extLst>
+              <a:ext uri="{FF2B5EF4-FFF2-40B4-BE49-F238E27FC236}">
+                <a16:creationId xmlns:a16="http://schemas.microsoft.com/office/drawing/2014/main" id="{84B44917-D6CC-E6C5-27BB-F0D4E52D45A7}"/>
+              </a:ext>
+            </a:extLst>
+          </p:cNvPr>
+          <p:cNvSpPr>
+            <a:spLocks noGrp="1" noRot="1" noChangeAspect="1"/>
+          </p:cNvSpPr>
+          <p:nvPr>
+            <p:ph type="sldImg"/>
+          </p:nvPr>
+        </p:nvSpPr>
+        <p:spPr>
+          <a:xfrm>
+            <a:off x="381000" y="685800"/>
+            <a:ext cx="6096000" cy="3429000"/>
+          </a:xfrm>
+        </p:spPr>
+      </p:sp>
+      <p:sp>
+        <p:nvSpPr>
+          <p:cNvPr id="3" name="Notes Placeholder 2">
+            <a:extLst>
+              <a:ext uri="{FF2B5EF4-FFF2-40B4-BE49-F238E27FC236}">
+                <a16:creationId xmlns:a16="http://schemas.microsoft.com/office/drawing/2014/main" id="{9D5C14DF-2E20-9A35-5896-BB9477ED4729}"/>
+              </a:ext>
+            </a:extLst>
+          </p:cNvPr>
+          <p:cNvSpPr>
+            <a:spLocks noGrp="1"/>
+          </p:cNvSpPr>
+          <p:nvPr>
+            <p:ph type="body" idx="1"/>
+          </p:nvPr>
+        </p:nvSpPr>
+        <p:spPr/>
+        <p:txBody>
+          <a:bodyPr>
+            <a:normAutofit/>
+          </a:bodyPr>
+          <a:lstStyle/>
+          <a:p>
+            <a:endParaRPr lang="en-US" dirty="0"/>
+          </a:p>
+        </p:txBody>
+      </p:sp>
+      <p:sp>
+        <p:nvSpPr>
+          <p:cNvPr id="4" name="Slide Number Placeholder 3">
+            <a:extLst>
+              <a:ext uri="{FF2B5EF4-FFF2-40B4-BE49-F238E27FC236}">
+                <a16:creationId xmlns:a16="http://schemas.microsoft.com/office/drawing/2014/main" id="{B8498E48-C123-D9FE-DBC1-35CEB0ECD692}"/>
+              </a:ext>
+            </a:extLst>
+          </p:cNvPr>
+          <p:cNvSpPr>
+            <a:spLocks noGrp="1"/>
+          </p:cNvSpPr>
+          <p:nvPr>
+            <p:ph type="sldNum" sz="quarter" idx="5"/>
+          </p:nvPr>
+        </p:nvSpPr>
+        <p:spPr/>
+        <p:txBody>
+          <a:bodyPr/>
+          <a:lstStyle/>
+          <a:p>
+            <a:pPr>
+              <a:defRPr/>
+            </a:pPr>
+            <a:fld id="{18B4ECCA-5441-478E-8672-6AB21BB71BD9}" type="slidenum">
+              <a:rPr lang="en-US" altLang="en-US" smtClean="0"/>
+              <a:pPr>
+                <a:defRPr/>
+              </a:pPr>
+              <a:t>21</a:t>
+            </a:fld>
+            <a:endParaRPr lang="en-US" altLang="en-US"/>
+          </a:p>
+        </p:txBody>
+      </p:sp>
+    </p:spTree>
+    <p:extLst>
+      <p:ext uri="{BB962C8B-B14F-4D97-AF65-F5344CB8AC3E}">
+        <p14:creationId xmlns:p14="http://schemas.microsoft.com/office/powerpoint/2010/main" val="4021370182"/>
+      </p:ext>
+    </p:extLst>
+  </p:cSld>
+  <p:clrMapOvr>
+    <a:masterClrMapping/>
+  </p:clrMapOvr>
+</p:notes>
+</file>
+
+<file path=ppt/notesSlides/notesSlide22.xml><?xml version="1.0" encoding="utf-8"?>
+<p:notes xmlns:a="http://schemas.openxmlformats.org/drawingml/2006/main" xmlns:r="http://schemas.openxmlformats.org/officeDocument/2006/relationships" xmlns:p="http://schemas.openxmlformats.org/presentationml/2006/main">
+  <p:cSld>
+    <p:spTree>
+      <p:nvGrpSpPr>
+        <p:cNvPr id="1" name="">
+          <a:extLst>
+            <a:ext uri="{FF2B5EF4-FFF2-40B4-BE49-F238E27FC236}">
+              <a16:creationId xmlns:a16="http://schemas.microsoft.com/office/drawing/2014/main" id="{27A143A5-B01B-41D9-8EEF-27EEDD495889}"/>
+            </a:ext>
+          </a:extLst>
+        </p:cNvPr>
+        <p:cNvGrpSpPr/>
+        <p:nvPr/>
+      </p:nvGrpSpPr>
+      <p:grpSpPr>
+        <a:xfrm>
+          <a:off x="0" y="0"/>
+          <a:ext cx="0" cy="0"/>
+          <a:chOff x="0" y="0"/>
+          <a:chExt cx="0" cy="0"/>
+        </a:xfrm>
+      </p:grpSpPr>
+      <p:sp>
+        <p:nvSpPr>
+          <p:cNvPr id="2" name="Slide Image Placeholder 1">
+            <a:extLst>
+              <a:ext uri="{FF2B5EF4-FFF2-40B4-BE49-F238E27FC236}">
+                <a16:creationId xmlns:a16="http://schemas.microsoft.com/office/drawing/2014/main" id="{94F3EC2D-2275-A960-E2F8-47EDACD05FB8}"/>
+              </a:ext>
+            </a:extLst>
+          </p:cNvPr>
+          <p:cNvSpPr>
+            <a:spLocks noGrp="1" noRot="1" noChangeAspect="1"/>
+          </p:cNvSpPr>
+          <p:nvPr>
+            <p:ph type="sldImg"/>
+          </p:nvPr>
+        </p:nvSpPr>
+        <p:spPr>
+          <a:xfrm>
+            <a:off x="381000" y="685800"/>
+            <a:ext cx="6096000" cy="3429000"/>
+          </a:xfrm>
+        </p:spPr>
+      </p:sp>
+      <p:sp>
+        <p:nvSpPr>
+          <p:cNvPr id="3" name="Notes Placeholder 2">
+            <a:extLst>
+              <a:ext uri="{FF2B5EF4-FFF2-40B4-BE49-F238E27FC236}">
+                <a16:creationId xmlns:a16="http://schemas.microsoft.com/office/drawing/2014/main" id="{4C677792-BDDC-9882-7351-6EDFAFA90EA6}"/>
+              </a:ext>
+            </a:extLst>
+          </p:cNvPr>
+          <p:cNvSpPr>
+            <a:spLocks noGrp="1"/>
+          </p:cNvSpPr>
+          <p:nvPr>
+            <p:ph type="body" idx="1"/>
+          </p:nvPr>
+        </p:nvSpPr>
+        <p:spPr/>
+        <p:txBody>
+          <a:bodyPr>
+            <a:normAutofit/>
+          </a:bodyPr>
+          <a:lstStyle/>
+          <a:p>
+            <a:endParaRPr lang="en-US" dirty="0"/>
+          </a:p>
+        </p:txBody>
+      </p:sp>
+      <p:sp>
+        <p:nvSpPr>
+          <p:cNvPr id="4" name="Slide Number Placeholder 3">
+            <a:extLst>
+              <a:ext uri="{FF2B5EF4-FFF2-40B4-BE49-F238E27FC236}">
+                <a16:creationId xmlns:a16="http://schemas.microsoft.com/office/drawing/2014/main" id="{7AB5C771-5718-8AC5-D2C5-CC1101042BCF}"/>
+              </a:ext>
+            </a:extLst>
+          </p:cNvPr>
+          <p:cNvSpPr>
+            <a:spLocks noGrp="1"/>
+          </p:cNvSpPr>
+          <p:nvPr>
+            <p:ph type="sldNum" sz="quarter" idx="5"/>
+          </p:nvPr>
+        </p:nvSpPr>
+        <p:spPr/>
+        <p:txBody>
+          <a:bodyPr/>
+          <a:lstStyle/>
+          <a:p>
+            <a:pPr>
+              <a:defRPr/>
+            </a:pPr>
+            <a:fld id="{18B4ECCA-5441-478E-8672-6AB21BB71BD9}" type="slidenum">
+              <a:rPr lang="en-US" altLang="en-US" smtClean="0"/>
+              <a:pPr>
+                <a:defRPr/>
+              </a:pPr>
+              <a:t>22</a:t>
+            </a:fld>
+            <a:endParaRPr lang="en-US" altLang="en-US"/>
+          </a:p>
+        </p:txBody>
+      </p:sp>
+    </p:spTree>
+    <p:extLst>
+      <p:ext uri="{BB962C8B-B14F-4D97-AF65-F5344CB8AC3E}">
+        <p14:creationId xmlns:p14="http://schemas.microsoft.com/office/powerpoint/2010/main" val="972595108"/>
+      </p:ext>
+    </p:extLst>
+  </p:cSld>
+  <p:clrMapOvr>
+    <a:masterClrMapping/>
+  </p:clrMapOvr>
+</p:notes>
+</file>
+
+<file path=ppt/notesSlides/notesSlide23.xml><?xml version="1.0" encoding="utf-8"?>
+<p:notes xmlns:a="http://schemas.openxmlformats.org/drawingml/2006/main" xmlns:r="http://schemas.openxmlformats.org/officeDocument/2006/relationships" xmlns:p="http://schemas.openxmlformats.org/presentationml/2006/main">
+  <p:cSld>
+    <p:spTree>
+      <p:nvGrpSpPr>
+        <p:cNvPr id="1" name="">
+          <a:extLst>
+            <a:ext uri="{FF2B5EF4-FFF2-40B4-BE49-F238E27FC236}">
+              <a16:creationId xmlns:a16="http://schemas.microsoft.com/office/drawing/2014/main" id="{B47A4B02-DDFE-533C-916E-FA6BC69901AD}"/>
+            </a:ext>
+          </a:extLst>
+        </p:cNvPr>
+        <p:cNvGrpSpPr/>
+        <p:nvPr/>
+      </p:nvGrpSpPr>
+      <p:grpSpPr>
+        <a:xfrm>
+          <a:off x="0" y="0"/>
+          <a:ext cx="0" cy="0"/>
+          <a:chOff x="0" y="0"/>
+          <a:chExt cx="0" cy="0"/>
+        </a:xfrm>
+      </p:grpSpPr>
+      <p:sp>
+        <p:nvSpPr>
+          <p:cNvPr id="2" name="Slide Image Placeholder 1">
+            <a:extLst>
+              <a:ext uri="{FF2B5EF4-FFF2-40B4-BE49-F238E27FC236}">
+                <a16:creationId xmlns:a16="http://schemas.microsoft.com/office/drawing/2014/main" id="{B8D21288-47D6-772F-DFD3-BCAD16035861}"/>
+              </a:ext>
+            </a:extLst>
+          </p:cNvPr>
+          <p:cNvSpPr>
+            <a:spLocks noGrp="1" noRot="1" noChangeAspect="1"/>
+          </p:cNvSpPr>
+          <p:nvPr>
+            <p:ph type="sldImg"/>
+          </p:nvPr>
+        </p:nvSpPr>
+        <p:spPr>
+          <a:xfrm>
+            <a:off x="381000" y="685800"/>
+            <a:ext cx="6096000" cy="3429000"/>
+          </a:xfrm>
+        </p:spPr>
+      </p:sp>
+      <p:sp>
+        <p:nvSpPr>
+          <p:cNvPr id="3" name="Notes Placeholder 2">
+            <a:extLst>
+              <a:ext uri="{FF2B5EF4-FFF2-40B4-BE49-F238E27FC236}">
+                <a16:creationId xmlns:a16="http://schemas.microsoft.com/office/drawing/2014/main" id="{A1E65F9D-10B9-271E-7A3F-823A6277CB89}"/>
+              </a:ext>
+            </a:extLst>
+          </p:cNvPr>
+          <p:cNvSpPr>
+            <a:spLocks noGrp="1"/>
+          </p:cNvSpPr>
+          <p:nvPr>
+            <p:ph type="body" idx="1"/>
+          </p:nvPr>
+        </p:nvSpPr>
+        <p:spPr/>
+        <p:txBody>
+          <a:bodyPr>
+            <a:normAutofit/>
+          </a:bodyPr>
+          <a:lstStyle/>
+          <a:p>
+            <a:endParaRPr lang="en-US" dirty="0"/>
+          </a:p>
+        </p:txBody>
+      </p:sp>
+      <p:sp>
+        <p:nvSpPr>
+          <p:cNvPr id="4" name="Slide Number Placeholder 3">
+            <a:extLst>
+              <a:ext uri="{FF2B5EF4-FFF2-40B4-BE49-F238E27FC236}">
+                <a16:creationId xmlns:a16="http://schemas.microsoft.com/office/drawing/2014/main" id="{9E6841A3-D0EA-92B3-7B8C-E7B4ACC9CB77}"/>
+              </a:ext>
+            </a:extLst>
+          </p:cNvPr>
+          <p:cNvSpPr>
+            <a:spLocks noGrp="1"/>
+          </p:cNvSpPr>
+          <p:nvPr>
+            <p:ph type="sldNum" sz="quarter" idx="5"/>
+          </p:nvPr>
+        </p:nvSpPr>
+        <p:spPr/>
+        <p:txBody>
+          <a:bodyPr/>
+          <a:lstStyle/>
+          <a:p>
+            <a:pPr>
+              <a:defRPr/>
+            </a:pPr>
+            <a:fld id="{18B4ECCA-5441-478E-8672-6AB21BB71BD9}" type="slidenum">
+              <a:rPr lang="en-US" altLang="en-US" smtClean="0"/>
+              <a:pPr>
+                <a:defRPr/>
+              </a:pPr>
+              <a:t>23</a:t>
+            </a:fld>
+            <a:endParaRPr lang="en-US" altLang="en-US"/>
+          </a:p>
+        </p:txBody>
+      </p:sp>
+    </p:spTree>
+    <p:extLst>
+      <p:ext uri="{BB962C8B-B14F-4D97-AF65-F5344CB8AC3E}">
+        <p14:creationId xmlns:p14="http://schemas.microsoft.com/office/powerpoint/2010/main" val="344475238"/>
+      </p:ext>
+    </p:extLst>
+  </p:cSld>
+  <p:clrMapOvr>
+    <a:masterClrMapping/>
+  </p:clrMapOvr>
+</p:notes>
+</file>
+
+<file path=ppt/notesSlides/notesSlide24.xml><?xml version="1.0" encoding="utf-8"?>
+<p:notes xmlns:a="http://schemas.openxmlformats.org/drawingml/2006/main" xmlns:r="http://schemas.openxmlformats.org/officeDocument/2006/relationships" xmlns:p="http://schemas.openxmlformats.org/presentationml/2006/main">
+  <p:cSld>
+    <p:spTree>
+      <p:nvGrpSpPr>
+        <p:cNvPr id="1" name="">
+          <a:extLst>
+            <a:ext uri="{FF2B5EF4-FFF2-40B4-BE49-F238E27FC236}">
+              <a16:creationId xmlns:a16="http://schemas.microsoft.com/office/drawing/2014/main" id="{EA09E201-8AD0-918A-128A-B5415F334CB4}"/>
+            </a:ext>
+          </a:extLst>
+        </p:cNvPr>
+        <p:cNvGrpSpPr/>
+        <p:nvPr/>
+      </p:nvGrpSpPr>
+      <p:grpSpPr>
+        <a:xfrm>
+          <a:off x="0" y="0"/>
+          <a:ext cx="0" cy="0"/>
+          <a:chOff x="0" y="0"/>
+          <a:chExt cx="0" cy="0"/>
+        </a:xfrm>
+      </p:grpSpPr>
+      <p:sp>
+        <p:nvSpPr>
+          <p:cNvPr id="2" name="Slide Image Placeholder 1">
+            <a:extLst>
+              <a:ext uri="{FF2B5EF4-FFF2-40B4-BE49-F238E27FC236}">
+                <a16:creationId xmlns:a16="http://schemas.microsoft.com/office/drawing/2014/main" id="{6BDF9413-02F9-19F1-99C8-05F91BCD4C80}"/>
+              </a:ext>
+            </a:extLst>
+          </p:cNvPr>
+          <p:cNvSpPr>
+            <a:spLocks noGrp="1" noRot="1" noChangeAspect="1"/>
+          </p:cNvSpPr>
+          <p:nvPr>
+            <p:ph type="sldImg"/>
+          </p:nvPr>
+        </p:nvSpPr>
+        <p:spPr>
+          <a:xfrm>
+            <a:off x="381000" y="685800"/>
+            <a:ext cx="6096000" cy="3429000"/>
+          </a:xfrm>
+        </p:spPr>
+      </p:sp>
+      <p:sp>
+        <p:nvSpPr>
+          <p:cNvPr id="3" name="Notes Placeholder 2">
+            <a:extLst>
+              <a:ext uri="{FF2B5EF4-FFF2-40B4-BE49-F238E27FC236}">
+                <a16:creationId xmlns:a16="http://schemas.microsoft.com/office/drawing/2014/main" id="{2F3AA86E-A316-A832-E9C1-26B5BA468CCA}"/>
+              </a:ext>
+            </a:extLst>
+          </p:cNvPr>
+          <p:cNvSpPr>
+            <a:spLocks noGrp="1"/>
+          </p:cNvSpPr>
+          <p:nvPr>
+            <p:ph type="body" idx="1"/>
+          </p:nvPr>
+        </p:nvSpPr>
+        <p:spPr/>
+        <p:txBody>
+          <a:bodyPr>
+            <a:normAutofit/>
+          </a:bodyPr>
+          <a:lstStyle/>
+          <a:p>
+            <a:endParaRPr lang="en-US" dirty="0"/>
+          </a:p>
+        </p:txBody>
+      </p:sp>
+      <p:sp>
+        <p:nvSpPr>
+          <p:cNvPr id="4" name="Slide Number Placeholder 3">
+            <a:extLst>
+              <a:ext uri="{FF2B5EF4-FFF2-40B4-BE49-F238E27FC236}">
+                <a16:creationId xmlns:a16="http://schemas.microsoft.com/office/drawing/2014/main" id="{1BEB5D6E-658E-25DC-33A5-DB48B7DA4ED4}"/>
+              </a:ext>
+            </a:extLst>
+          </p:cNvPr>
+          <p:cNvSpPr>
+            <a:spLocks noGrp="1"/>
+          </p:cNvSpPr>
+          <p:nvPr>
+            <p:ph type="sldNum" sz="quarter" idx="5"/>
+          </p:nvPr>
+        </p:nvSpPr>
+        <p:spPr/>
+        <p:txBody>
+          <a:bodyPr/>
+          <a:lstStyle/>
+          <a:p>
+            <a:pPr>
+              <a:defRPr/>
+            </a:pPr>
+            <a:fld id="{18B4ECCA-5441-478E-8672-6AB21BB71BD9}" type="slidenum">
+              <a:rPr lang="en-US" altLang="en-US" smtClean="0"/>
+              <a:pPr>
+                <a:defRPr/>
+              </a:pPr>
+              <a:t>24</a:t>
+            </a:fld>
+            <a:endParaRPr lang="en-US" altLang="en-US"/>
+          </a:p>
+        </p:txBody>
+      </p:sp>
+    </p:spTree>
+    <p:extLst>
+      <p:ext uri="{BB962C8B-B14F-4D97-AF65-F5344CB8AC3E}">
+        <p14:creationId xmlns:p14="http://schemas.microsoft.com/office/powerpoint/2010/main" val="1497255969"/>
+      </p:ext>
+    </p:extLst>
+  </p:cSld>
+  <p:clrMapOvr>
+    <a:masterClrMapping/>
+  </p:clrMapOvr>
+</p:notes>
+</file>
+
+<file path=ppt/notesSlides/notesSlide25.xml><?xml version="1.0" encoding="utf-8"?>
+<p:notes xmlns:a="http://schemas.openxmlformats.org/drawingml/2006/main" xmlns:r="http://schemas.openxmlformats.org/officeDocument/2006/relationships" xmlns:p="http://schemas.openxmlformats.org/presentationml/2006/main">
+  <p:cSld>
+    <p:spTree>
+      <p:nvGrpSpPr>
+        <p:cNvPr id="1" name="">
+          <a:extLst>
+            <a:ext uri="{FF2B5EF4-FFF2-40B4-BE49-F238E27FC236}">
+              <a16:creationId xmlns:a16="http://schemas.microsoft.com/office/drawing/2014/main" id="{0FF2BB5F-617A-3ADE-6918-9265910A28C4}"/>
+            </a:ext>
+          </a:extLst>
+        </p:cNvPr>
+        <p:cNvGrpSpPr/>
+        <p:nvPr/>
+      </p:nvGrpSpPr>
+      <p:grpSpPr>
+        <a:xfrm>
+          <a:off x="0" y="0"/>
+          <a:ext cx="0" cy="0"/>
+          <a:chOff x="0" y="0"/>
+          <a:chExt cx="0" cy="0"/>
+        </a:xfrm>
+      </p:grpSpPr>
+      <p:sp>
+        <p:nvSpPr>
+          <p:cNvPr id="2" name="Slide Image Placeholder 1">
+            <a:extLst>
+              <a:ext uri="{FF2B5EF4-FFF2-40B4-BE49-F238E27FC236}">
+                <a16:creationId xmlns:a16="http://schemas.microsoft.com/office/drawing/2014/main" id="{155EB9A5-1AEC-F9B2-A8B8-6B9560ABA7B4}"/>
+              </a:ext>
+            </a:extLst>
+          </p:cNvPr>
+          <p:cNvSpPr>
+            <a:spLocks noGrp="1" noRot="1" noChangeAspect="1"/>
+          </p:cNvSpPr>
+          <p:nvPr>
+            <p:ph type="sldImg"/>
+          </p:nvPr>
+        </p:nvSpPr>
+        <p:spPr>
+          <a:xfrm>
+            <a:off x="381000" y="685800"/>
+            <a:ext cx="6096000" cy="3429000"/>
+          </a:xfrm>
+        </p:spPr>
+      </p:sp>
+      <p:sp>
+        <p:nvSpPr>
+          <p:cNvPr id="3" name="Notes Placeholder 2">
+            <a:extLst>
+              <a:ext uri="{FF2B5EF4-FFF2-40B4-BE49-F238E27FC236}">
+                <a16:creationId xmlns:a16="http://schemas.microsoft.com/office/drawing/2014/main" id="{3ED8BAD0-FAC2-BF55-0868-C1A9DB3C505B}"/>
+              </a:ext>
+            </a:extLst>
+          </p:cNvPr>
+          <p:cNvSpPr>
+            <a:spLocks noGrp="1"/>
+          </p:cNvSpPr>
+          <p:nvPr>
+            <p:ph type="body" idx="1"/>
+          </p:nvPr>
+        </p:nvSpPr>
+        <p:spPr/>
+        <p:txBody>
+          <a:bodyPr>
+            <a:normAutofit/>
+          </a:bodyPr>
+          <a:lstStyle/>
+          <a:p>
+            <a:endParaRPr lang="en-US" dirty="0"/>
+          </a:p>
+        </p:txBody>
+      </p:sp>
+      <p:sp>
+        <p:nvSpPr>
+          <p:cNvPr id="4" name="Slide Number Placeholder 3">
+            <a:extLst>
+              <a:ext uri="{FF2B5EF4-FFF2-40B4-BE49-F238E27FC236}">
+                <a16:creationId xmlns:a16="http://schemas.microsoft.com/office/drawing/2014/main" id="{CCF89CCB-3192-1F56-731E-07E6DEEC4137}"/>
+              </a:ext>
+            </a:extLst>
+          </p:cNvPr>
+          <p:cNvSpPr>
+            <a:spLocks noGrp="1"/>
+          </p:cNvSpPr>
+          <p:nvPr>
+            <p:ph type="sldNum" sz="quarter" idx="5"/>
+          </p:nvPr>
+        </p:nvSpPr>
+        <p:spPr/>
+        <p:txBody>
+          <a:bodyPr/>
+          <a:lstStyle/>
+          <a:p>
+            <a:pPr>
+              <a:defRPr/>
+            </a:pPr>
+            <a:fld id="{18B4ECCA-5441-478E-8672-6AB21BB71BD9}" type="slidenum">
+              <a:rPr lang="en-US" altLang="en-US" smtClean="0"/>
+              <a:pPr>
+                <a:defRPr/>
+              </a:pPr>
+              <a:t>25</a:t>
+            </a:fld>
+            <a:endParaRPr lang="en-US" altLang="en-US"/>
+          </a:p>
+        </p:txBody>
+      </p:sp>
+    </p:spTree>
+    <p:extLst>
+      <p:ext uri="{BB962C8B-B14F-4D97-AF65-F5344CB8AC3E}">
+        <p14:creationId xmlns:p14="http://schemas.microsoft.com/office/powerpoint/2010/main" val="983335774"/>
+      </p:ext>
+    </p:extLst>
+  </p:cSld>
+  <p:clrMapOvr>
+    <a:masterClrMapping/>
+  </p:clrMapOvr>
+</p:notes>
+</file>
+
+<file path=ppt/notesSlides/notesSlide26.xml><?xml version="1.0" encoding="utf-8"?>
+<p:notes xmlns:a="http://schemas.openxmlformats.org/drawingml/2006/main" xmlns:r="http://schemas.openxmlformats.org/officeDocument/2006/relationships" xmlns:p="http://schemas.openxmlformats.org/presentationml/2006/main">
+  <p:cSld>
+    <p:spTree>
+      <p:nvGrpSpPr>
         <p:cNvPr id="1" name=""/>
         <p:cNvGrpSpPr/>
         <p:nvPr/>
@@ -2410,7 +3142,7 @@
               <a:pPr>
                 <a:defRPr/>
               </a:pPr>
-              <a:t>20</a:t>
+              <a:t>26</a:t>
             </a:fld>
             <a:endParaRPr lang="en-US" altLang="en-US" dirty="0"/>
           </a:p>
@@ -53103,6 +53835,3888 @@
   <p:cSld>
     <p:spTree>
       <p:nvGrpSpPr>
+        <p:cNvPr id="1" name="">
+          <a:extLst>
+            <a:ext uri="{FF2B5EF4-FFF2-40B4-BE49-F238E27FC236}">
+              <a16:creationId xmlns:a16="http://schemas.microsoft.com/office/drawing/2014/main" id="{5BC4C23F-A0A3-82CA-6294-5E515DCD565D}"/>
+            </a:ext>
+          </a:extLst>
+        </p:cNvPr>
+        <p:cNvGrpSpPr/>
+        <p:nvPr/>
+      </p:nvGrpSpPr>
+      <p:grpSpPr>
+        <a:xfrm>
+          <a:off x="0" y="0"/>
+          <a:ext cx="0" cy="0"/>
+          <a:chOff x="0" y="0"/>
+          <a:chExt cx="0" cy="0"/>
+        </a:xfrm>
+      </p:grpSpPr>
+      <p:sp>
+        <p:nvSpPr>
+          <p:cNvPr id="4" name="Slide Number Placeholder 3">
+            <a:extLst>
+              <a:ext uri="{FF2B5EF4-FFF2-40B4-BE49-F238E27FC236}">
+                <a16:creationId xmlns:a16="http://schemas.microsoft.com/office/drawing/2014/main" id="{81CDF03D-F0FE-5EC7-8863-2926F982565D}"/>
+              </a:ext>
+            </a:extLst>
+          </p:cNvPr>
+          <p:cNvSpPr>
+            <a:spLocks noGrp="1"/>
+          </p:cNvSpPr>
+          <p:nvPr>
+            <p:ph type="sldNum" sz="quarter" idx="4"/>
+          </p:nvPr>
+        </p:nvSpPr>
+        <p:spPr/>
+        <p:txBody>
+          <a:bodyPr/>
+          <a:lstStyle/>
+          <a:p>
+            <a:fld id="{71B8893A-F325-44A6-8EFB-883C20332CFE}" type="slidenum">
+              <a:rPr lang="en-US" smtClean="0"/>
+              <a:pPr/>
+              <a:t>20</a:t>
+            </a:fld>
+            <a:endParaRPr lang="en-US"/>
+          </a:p>
+        </p:txBody>
+      </p:sp>
+      <p:sp>
+        <p:nvSpPr>
+          <p:cNvPr id="3" name="Title 2">
+            <a:extLst>
+              <a:ext uri="{FF2B5EF4-FFF2-40B4-BE49-F238E27FC236}">
+                <a16:creationId xmlns:a16="http://schemas.microsoft.com/office/drawing/2014/main" id="{107DE4BB-FE86-2EEA-D3CA-E09E0CFD5C8E}"/>
+              </a:ext>
+            </a:extLst>
+          </p:cNvPr>
+          <p:cNvSpPr>
+            <a:spLocks noGrp="1"/>
+          </p:cNvSpPr>
+          <p:nvPr>
+            <p:ph type="title"/>
+          </p:nvPr>
+        </p:nvSpPr>
+        <p:spPr>
+          <a:xfrm>
+            <a:off x="537117" y="1374404"/>
+            <a:ext cx="7898780" cy="857250"/>
+          </a:xfrm>
+        </p:spPr>
+        <p:txBody>
+          <a:bodyPr/>
+          <a:lstStyle/>
+          <a:p>
+            <a:br>
+              <a:rPr lang="en-US" dirty="0"/>
+            </a:br>
+            <a:endParaRPr lang="en-US" dirty="0"/>
+          </a:p>
+        </p:txBody>
+      </p:sp>
+      <p:sp>
+        <p:nvSpPr>
+          <p:cNvPr id="2" name="Title 1">
+            <a:extLst>
+              <a:ext uri="{FF2B5EF4-FFF2-40B4-BE49-F238E27FC236}">
+                <a16:creationId xmlns:a16="http://schemas.microsoft.com/office/drawing/2014/main" id="{595C99C5-4994-3451-6CD5-69075FFF82A4}"/>
+              </a:ext>
+            </a:extLst>
+          </p:cNvPr>
+          <p:cNvSpPr txBox="1">
+            <a:spLocks/>
+          </p:cNvSpPr>
+          <p:nvPr/>
+        </p:nvSpPr>
+        <p:spPr>
+          <a:xfrm>
+            <a:off x="505521" y="651068"/>
+            <a:ext cx="7961972" cy="585207"/>
+          </a:xfrm>
+          <a:prstGeom prst="rect">
+            <a:avLst/>
+          </a:prstGeom>
+          <a:noFill/>
+          <a:ln>
+            <a:noFill/>
+          </a:ln>
+        </p:spPr>
+        <p:txBody>
+          <a:bodyPr spcFirstLastPara="1" wrap="square" lIns="0" tIns="0" rIns="0" bIns="0" anchor="t" anchorCtr="0">
+            <a:noAutofit/>
+          </a:bodyPr>
+          <a:lstStyle>
+            <a:defPPr marR="0" lvl="0" algn="l" rtl="0">
+              <a:lnSpc>
+                <a:spcPct val="100000"/>
+              </a:lnSpc>
+              <a:spcBef>
+                <a:spcPts val="0"/>
+              </a:spcBef>
+              <a:spcAft>
+                <a:spcPts val="0"/>
+              </a:spcAft>
+            </a:defPPr>
+            <a:lvl1pPr marR="0" lvl="0" algn="l" rtl="0">
+              <a:lnSpc>
+                <a:spcPct val="90000"/>
+              </a:lnSpc>
+              <a:spcBef>
+                <a:spcPts val="0"/>
+              </a:spcBef>
+              <a:spcAft>
+                <a:spcPts val="0"/>
+              </a:spcAft>
+              <a:buClr>
+                <a:schemeClr val="dk1"/>
+              </a:buClr>
+              <a:buSzPts val="2400"/>
+              <a:buFont typeface="Arial"/>
+              <a:buNone/>
+              <a:defRPr sz="2400" b="0" i="0" u="none" strike="noStrike" cap="none">
+                <a:solidFill>
+                  <a:schemeClr val="dk1"/>
+                </a:solidFill>
+                <a:latin typeface="Arial"/>
+                <a:ea typeface="Arial"/>
+                <a:cs typeface="Arial"/>
+                <a:sym typeface="Arial"/>
+              </a:defRPr>
+            </a:lvl1pPr>
+            <a:lvl2pPr marR="0" lvl="1" algn="l" rtl="0">
+              <a:lnSpc>
+                <a:spcPct val="100000"/>
+              </a:lnSpc>
+              <a:spcBef>
+                <a:spcPts val="0"/>
+              </a:spcBef>
+              <a:spcAft>
+                <a:spcPts val="0"/>
+              </a:spcAft>
+              <a:buClr>
+                <a:srgbClr val="000000"/>
+              </a:buClr>
+              <a:buSzPts val="1400"/>
+              <a:buFont typeface="Arial"/>
+              <a:buNone/>
+              <a:defRPr sz="1800" b="0" i="0" u="none" strike="noStrike" cap="none">
+                <a:solidFill>
+                  <a:srgbClr val="000000"/>
+                </a:solidFill>
+                <a:latin typeface="Arial"/>
+                <a:ea typeface="Arial"/>
+                <a:cs typeface="Arial"/>
+                <a:sym typeface="Arial"/>
+              </a:defRPr>
+            </a:lvl2pPr>
+            <a:lvl3pPr marR="0" lvl="2" algn="l" rtl="0">
+              <a:lnSpc>
+                <a:spcPct val="100000"/>
+              </a:lnSpc>
+              <a:spcBef>
+                <a:spcPts val="0"/>
+              </a:spcBef>
+              <a:spcAft>
+                <a:spcPts val="0"/>
+              </a:spcAft>
+              <a:buClr>
+                <a:srgbClr val="000000"/>
+              </a:buClr>
+              <a:buSzPts val="1400"/>
+              <a:buFont typeface="Arial"/>
+              <a:buNone/>
+              <a:defRPr sz="1800" b="0" i="0" u="none" strike="noStrike" cap="none">
+                <a:solidFill>
+                  <a:srgbClr val="000000"/>
+                </a:solidFill>
+                <a:latin typeface="Arial"/>
+                <a:ea typeface="Arial"/>
+                <a:cs typeface="Arial"/>
+                <a:sym typeface="Arial"/>
+              </a:defRPr>
+            </a:lvl3pPr>
+            <a:lvl4pPr marR="0" lvl="3" algn="l" rtl="0">
+              <a:lnSpc>
+                <a:spcPct val="100000"/>
+              </a:lnSpc>
+              <a:spcBef>
+                <a:spcPts val="0"/>
+              </a:spcBef>
+              <a:spcAft>
+                <a:spcPts val="0"/>
+              </a:spcAft>
+              <a:buClr>
+                <a:srgbClr val="000000"/>
+              </a:buClr>
+              <a:buSzPts val="1400"/>
+              <a:buFont typeface="Arial"/>
+              <a:buNone/>
+              <a:defRPr sz="1800" b="0" i="0" u="none" strike="noStrike" cap="none">
+                <a:solidFill>
+                  <a:srgbClr val="000000"/>
+                </a:solidFill>
+                <a:latin typeface="Arial"/>
+                <a:ea typeface="Arial"/>
+                <a:cs typeface="Arial"/>
+                <a:sym typeface="Arial"/>
+              </a:defRPr>
+            </a:lvl4pPr>
+            <a:lvl5pPr marR="0" lvl="4" algn="l" rtl="0">
+              <a:lnSpc>
+                <a:spcPct val="100000"/>
+              </a:lnSpc>
+              <a:spcBef>
+                <a:spcPts val="0"/>
+              </a:spcBef>
+              <a:spcAft>
+                <a:spcPts val="0"/>
+              </a:spcAft>
+              <a:buClr>
+                <a:srgbClr val="000000"/>
+              </a:buClr>
+              <a:buSzPts val="1400"/>
+              <a:buFont typeface="Arial"/>
+              <a:buNone/>
+              <a:defRPr sz="1800" b="0" i="0" u="none" strike="noStrike" cap="none">
+                <a:solidFill>
+                  <a:srgbClr val="000000"/>
+                </a:solidFill>
+                <a:latin typeface="Arial"/>
+                <a:ea typeface="Arial"/>
+                <a:cs typeface="Arial"/>
+                <a:sym typeface="Arial"/>
+              </a:defRPr>
+            </a:lvl5pPr>
+            <a:lvl6pPr marR="0" lvl="5" algn="l" rtl="0">
+              <a:lnSpc>
+                <a:spcPct val="100000"/>
+              </a:lnSpc>
+              <a:spcBef>
+                <a:spcPts val="0"/>
+              </a:spcBef>
+              <a:spcAft>
+                <a:spcPts val="0"/>
+              </a:spcAft>
+              <a:buClr>
+                <a:srgbClr val="000000"/>
+              </a:buClr>
+              <a:buSzPts val="1400"/>
+              <a:buFont typeface="Arial"/>
+              <a:buNone/>
+              <a:defRPr sz="1800" b="0" i="0" u="none" strike="noStrike" cap="none">
+                <a:solidFill>
+                  <a:srgbClr val="000000"/>
+                </a:solidFill>
+                <a:latin typeface="Arial"/>
+                <a:ea typeface="Arial"/>
+                <a:cs typeface="Arial"/>
+                <a:sym typeface="Arial"/>
+              </a:defRPr>
+            </a:lvl6pPr>
+            <a:lvl7pPr marR="0" lvl="6" algn="l" rtl="0">
+              <a:lnSpc>
+                <a:spcPct val="100000"/>
+              </a:lnSpc>
+              <a:spcBef>
+                <a:spcPts val="0"/>
+              </a:spcBef>
+              <a:spcAft>
+                <a:spcPts val="0"/>
+              </a:spcAft>
+              <a:buClr>
+                <a:srgbClr val="000000"/>
+              </a:buClr>
+              <a:buSzPts val="1400"/>
+              <a:buFont typeface="Arial"/>
+              <a:buNone/>
+              <a:defRPr sz="1800" b="0" i="0" u="none" strike="noStrike" cap="none">
+                <a:solidFill>
+                  <a:srgbClr val="000000"/>
+                </a:solidFill>
+                <a:latin typeface="Arial"/>
+                <a:ea typeface="Arial"/>
+                <a:cs typeface="Arial"/>
+                <a:sym typeface="Arial"/>
+              </a:defRPr>
+            </a:lvl7pPr>
+            <a:lvl8pPr marR="0" lvl="7" algn="l" rtl="0">
+              <a:lnSpc>
+                <a:spcPct val="100000"/>
+              </a:lnSpc>
+              <a:spcBef>
+                <a:spcPts val="0"/>
+              </a:spcBef>
+              <a:spcAft>
+                <a:spcPts val="0"/>
+              </a:spcAft>
+              <a:buClr>
+                <a:srgbClr val="000000"/>
+              </a:buClr>
+              <a:buSzPts val="1400"/>
+              <a:buFont typeface="Arial"/>
+              <a:buNone/>
+              <a:defRPr sz="1800" b="0" i="0" u="none" strike="noStrike" cap="none">
+                <a:solidFill>
+                  <a:srgbClr val="000000"/>
+                </a:solidFill>
+                <a:latin typeface="Arial"/>
+                <a:ea typeface="Arial"/>
+                <a:cs typeface="Arial"/>
+                <a:sym typeface="Arial"/>
+              </a:defRPr>
+            </a:lvl8pPr>
+            <a:lvl9pPr marR="0" lvl="8" algn="l" rtl="0">
+              <a:lnSpc>
+                <a:spcPct val="100000"/>
+              </a:lnSpc>
+              <a:spcBef>
+                <a:spcPts val="0"/>
+              </a:spcBef>
+              <a:spcAft>
+                <a:spcPts val="0"/>
+              </a:spcAft>
+              <a:buClr>
+                <a:srgbClr val="000000"/>
+              </a:buClr>
+              <a:buSzPts val="1400"/>
+              <a:buFont typeface="Arial"/>
+              <a:buNone/>
+              <a:defRPr sz="1800" b="0" i="0" u="none" strike="noStrike" cap="none">
+                <a:solidFill>
+                  <a:srgbClr val="000000"/>
+                </a:solidFill>
+                <a:latin typeface="Arial"/>
+                <a:ea typeface="Arial"/>
+                <a:cs typeface="Arial"/>
+                <a:sym typeface="Arial"/>
+              </a:defRPr>
+            </a:lvl9pPr>
+          </a:lstStyle>
+          <a:p>
+            <a:r>
+              <a:rPr lang="en-US" dirty="0"/>
+              <a:t>Functions with default parameters</a:t>
+            </a:r>
+          </a:p>
+        </p:txBody>
+      </p:sp>
+      <p:sp>
+        <p:nvSpPr>
+          <p:cNvPr id="7" name="TextBox 6">
+            <a:extLst>
+              <a:ext uri="{FF2B5EF4-FFF2-40B4-BE49-F238E27FC236}">
+                <a16:creationId xmlns:a16="http://schemas.microsoft.com/office/drawing/2014/main" id="{74AF6A24-7D0C-57B0-E57C-1B68D4921635}"/>
+              </a:ext>
+            </a:extLst>
+          </p:cNvPr>
+          <p:cNvSpPr txBox="1"/>
+          <p:nvPr/>
+        </p:nvSpPr>
+        <p:spPr>
+          <a:xfrm>
+            <a:off x="449765" y="1172909"/>
+            <a:ext cx="7921083" cy="2246769"/>
+          </a:xfrm>
+          <a:prstGeom prst="rect">
+            <a:avLst/>
+          </a:prstGeom>
+          <a:noFill/>
+        </p:spPr>
+        <p:txBody>
+          <a:bodyPr wrap="square">
+            <a:spAutoFit/>
+          </a:bodyPr>
+          <a:lstStyle/>
+          <a:p>
+            <a:r>
+              <a:rPr lang="en-US" sz="2000" dirty="0"/>
+              <a:t>When you define a function in Python, you can give some parameters a </a:t>
+            </a:r>
+            <a:r>
+              <a:rPr lang="en-US" sz="2000" b="1" dirty="0"/>
+              <a:t>default value</a:t>
+            </a:r>
+            <a:r>
+              <a:rPr lang="en-US" sz="2000" dirty="0"/>
+              <a:t>. If the caller doesn't supply an argument for that parameter, Python automatically uses the default instead of raising an error.</a:t>
+            </a:r>
+          </a:p>
+          <a:p>
+            <a:endParaRPr lang="en-US" sz="2000" dirty="0"/>
+          </a:p>
+          <a:p>
+            <a:endParaRPr lang="en-US" sz="2000" dirty="0"/>
+          </a:p>
+          <a:p>
+            <a:endParaRPr lang="en-US" sz="2000" dirty="0"/>
+          </a:p>
+        </p:txBody>
+      </p:sp>
+      <p:sp>
+        <p:nvSpPr>
+          <p:cNvPr id="6" name="TextBox 5">
+            <a:extLst>
+              <a:ext uri="{FF2B5EF4-FFF2-40B4-BE49-F238E27FC236}">
+                <a16:creationId xmlns:a16="http://schemas.microsoft.com/office/drawing/2014/main" id="{7F9A76A7-D16D-F267-6A84-EB102683F900}"/>
+              </a:ext>
+            </a:extLst>
+          </p:cNvPr>
+          <p:cNvSpPr txBox="1"/>
+          <p:nvPr/>
+        </p:nvSpPr>
+        <p:spPr>
+          <a:xfrm>
+            <a:off x="1135565" y="2844138"/>
+            <a:ext cx="6320884" cy="1169551"/>
+          </a:xfrm>
+          <a:prstGeom prst="rect">
+            <a:avLst/>
+          </a:prstGeom>
+          <a:noFill/>
+        </p:spPr>
+        <p:txBody>
+          <a:bodyPr wrap="square">
+            <a:spAutoFit/>
+          </a:bodyPr>
+          <a:lstStyle/>
+          <a:p>
+            <a:r>
+              <a:rPr lang="en-US" dirty="0"/>
+              <a:t>def greet(name, greeting="Hello"):</a:t>
+            </a:r>
+          </a:p>
+          <a:p>
+            <a:r>
+              <a:rPr lang="en-US" dirty="0"/>
+              <a:t>    print(f"{greeting}, {name}!")</a:t>
+            </a:r>
+          </a:p>
+          <a:p>
+            <a:endParaRPr lang="en-US" dirty="0"/>
+          </a:p>
+          <a:p>
+            <a:r>
+              <a:rPr lang="en-US" dirty="0"/>
+              <a:t>greet("Maria")               # Hello, Maria!</a:t>
+            </a:r>
+          </a:p>
+          <a:p>
+            <a:r>
+              <a:rPr lang="en-US" dirty="0"/>
+              <a:t>greet("Maria", "Howdy")      # Howdy, Maria!</a:t>
+            </a:r>
+          </a:p>
+        </p:txBody>
+      </p:sp>
+    </p:spTree>
+    <p:extLst>
+      <p:ext uri="{BB962C8B-B14F-4D97-AF65-F5344CB8AC3E}">
+        <p14:creationId xmlns:p14="http://schemas.microsoft.com/office/powerpoint/2010/main" val="415047759"/>
+      </p:ext>
+    </p:extLst>
+  </p:cSld>
+  <p:clrMapOvr>
+    <a:masterClrMapping/>
+  </p:clrMapOvr>
+  <p:timing>
+    <p:tnLst>
+      <p:par>
+        <p:cTn id="1" dur="indefinite" restart="never" nodeType="tmRoot">
+          <p:childTnLst>
+            <p:seq concurrent="1" nextAc="seek">
+              <p:cTn id="2" dur="indefinite" nodeType="mainSeq">
+                <p:childTnLst>
+                  <p:par>
+                    <p:cTn id="3" fill="hold">
+                      <p:stCondLst>
+                        <p:cond delay="indefinite"/>
+                      </p:stCondLst>
+                      <p:childTnLst>
+                        <p:par>
+                          <p:cTn id="4" fill="hold">
+                            <p:stCondLst>
+                              <p:cond delay="0"/>
+                            </p:stCondLst>
+                            <p:childTnLst>
+                              <p:par>
+                                <p:cTn id="5" presetID="1" presetClass="entr" presetSubtype="0" fill="hold" nodeType="clickEffect">
+                                  <p:stCondLst>
+                                    <p:cond delay="0"/>
+                                  </p:stCondLst>
+                                  <p:childTnLst>
+                                    <p:set>
+                                      <p:cBhvr>
+                                        <p:cTn id="6" dur="1" fill="hold">
+                                          <p:stCondLst>
+                                            <p:cond delay="0"/>
+                                          </p:stCondLst>
+                                        </p:cTn>
+                                        <p:tgtEl>
+                                          <p:spTgt spid="6">
+                                            <p:txEl>
+                                              <p:pRg st="0" end="0"/>
+                                            </p:txEl>
+                                          </p:spTgt>
+                                        </p:tgtEl>
+                                        <p:attrNameLst>
+                                          <p:attrName>style.visibility</p:attrName>
+                                        </p:attrNameLst>
+                                      </p:cBhvr>
+                                      <p:to>
+                                        <p:strVal val="visible"/>
+                                      </p:to>
+                                    </p:set>
+                                  </p:childTnLst>
+                                </p:cTn>
+                              </p:par>
+                              <p:par>
+                                <p:cTn id="7" presetID="1" presetClass="entr" presetSubtype="0" fill="hold" nodeType="withEffect">
+                                  <p:stCondLst>
+                                    <p:cond delay="0"/>
+                                  </p:stCondLst>
+                                  <p:childTnLst>
+                                    <p:set>
+                                      <p:cBhvr>
+                                        <p:cTn id="8" dur="1" fill="hold">
+                                          <p:stCondLst>
+                                            <p:cond delay="0"/>
+                                          </p:stCondLst>
+                                        </p:cTn>
+                                        <p:tgtEl>
+                                          <p:spTgt spid="6">
+                                            <p:txEl>
+                                              <p:pRg st="1" end="1"/>
+                                            </p:txEl>
+                                          </p:spTgt>
+                                        </p:tgtEl>
+                                        <p:attrNameLst>
+                                          <p:attrName>style.visibility</p:attrName>
+                                        </p:attrNameLst>
+                                      </p:cBhvr>
+                                      <p:to>
+                                        <p:strVal val="visible"/>
+                                      </p:to>
+                                    </p:set>
+                                  </p:childTnLst>
+                                </p:cTn>
+                              </p:par>
+                            </p:childTnLst>
+                          </p:cTn>
+                        </p:par>
+                      </p:childTnLst>
+                    </p:cTn>
+                  </p:par>
+                  <p:par>
+                    <p:cTn id="9" fill="hold">
+                      <p:stCondLst>
+                        <p:cond delay="indefinite"/>
+                      </p:stCondLst>
+                      <p:childTnLst>
+                        <p:par>
+                          <p:cTn id="10" fill="hold">
+                            <p:stCondLst>
+                              <p:cond delay="0"/>
+                            </p:stCondLst>
+                            <p:childTnLst>
+                              <p:par>
+                                <p:cTn id="11" presetID="1" presetClass="entr" presetSubtype="0" fill="hold" nodeType="clickEffect">
+                                  <p:stCondLst>
+                                    <p:cond delay="0"/>
+                                  </p:stCondLst>
+                                  <p:childTnLst>
+                                    <p:set>
+                                      <p:cBhvr>
+                                        <p:cTn id="12" dur="1" fill="hold">
+                                          <p:stCondLst>
+                                            <p:cond delay="0"/>
+                                          </p:stCondLst>
+                                        </p:cTn>
+                                        <p:tgtEl>
+                                          <p:spTgt spid="6">
+                                            <p:txEl>
+                                              <p:pRg st="3" end="3"/>
+                                            </p:txEl>
+                                          </p:spTgt>
+                                        </p:tgtEl>
+                                        <p:attrNameLst>
+                                          <p:attrName>style.visibility</p:attrName>
+                                        </p:attrNameLst>
+                                      </p:cBhvr>
+                                      <p:to>
+                                        <p:strVal val="visible"/>
+                                      </p:to>
+                                    </p:set>
+                                  </p:childTnLst>
+                                </p:cTn>
+                              </p:par>
+                              <p:par>
+                                <p:cTn id="13" presetID="1" presetClass="entr" presetSubtype="0" fill="hold" nodeType="withEffect">
+                                  <p:stCondLst>
+                                    <p:cond delay="0"/>
+                                  </p:stCondLst>
+                                  <p:childTnLst>
+                                    <p:set>
+                                      <p:cBhvr>
+                                        <p:cTn id="14" dur="1" fill="hold">
+                                          <p:stCondLst>
+                                            <p:cond delay="0"/>
+                                          </p:stCondLst>
+                                        </p:cTn>
+                                        <p:tgtEl>
+                                          <p:spTgt spid="6">
+                                            <p:txEl>
+                                              <p:pRg st="4" end="4"/>
+                                            </p:txEl>
+                                          </p:spTgt>
+                                        </p:tgtEl>
+                                        <p:attrNameLst>
+                                          <p:attrName>style.visibility</p:attrName>
+                                        </p:attrNameLst>
+                                      </p:cBhvr>
+                                      <p:to>
+                                        <p:strVal val="visible"/>
+                                      </p:to>
+                                    </p:set>
+                                  </p:childTnLst>
+                                </p:cTn>
+                              </p:par>
+                            </p:childTnLst>
+                          </p:cTn>
+                        </p:par>
+                      </p:childTnLst>
+                    </p:cTn>
+                  </p:par>
+                </p:childTnLst>
+              </p:cTn>
+              <p:prevCondLst>
+                <p:cond evt="onPrev" delay="0">
+                  <p:tgtEl>
+                    <p:sldTgt/>
+                  </p:tgtEl>
+                </p:cond>
+              </p:prevCondLst>
+              <p:nextCondLst>
+                <p:cond evt="onNext" delay="0">
+                  <p:tgtEl>
+                    <p:sldTgt/>
+                  </p:tgtEl>
+                </p:cond>
+              </p:nextCondLst>
+            </p:seq>
+          </p:childTnLst>
+        </p:cTn>
+      </p:par>
+    </p:tnLst>
+  </p:timing>
+</p:sld>
+</file>
+
+<file path=ppt/slides/slide21.xml><?xml version="1.0" encoding="utf-8"?>
+<p:sld xmlns:a="http://schemas.openxmlformats.org/drawingml/2006/main" xmlns:r="http://schemas.openxmlformats.org/officeDocument/2006/relationships" xmlns:p="http://schemas.openxmlformats.org/presentationml/2006/main">
+  <p:cSld>
+    <p:spTree>
+      <p:nvGrpSpPr>
+        <p:cNvPr id="1" name="">
+          <a:extLst>
+            <a:ext uri="{FF2B5EF4-FFF2-40B4-BE49-F238E27FC236}">
+              <a16:creationId xmlns:a16="http://schemas.microsoft.com/office/drawing/2014/main" id="{91816853-DE1B-9E9F-4E5C-4BD22F791C2B}"/>
+            </a:ext>
+          </a:extLst>
+        </p:cNvPr>
+        <p:cNvGrpSpPr/>
+        <p:nvPr/>
+      </p:nvGrpSpPr>
+      <p:grpSpPr>
+        <a:xfrm>
+          <a:off x="0" y="0"/>
+          <a:ext cx="0" cy="0"/>
+          <a:chOff x="0" y="0"/>
+          <a:chExt cx="0" cy="0"/>
+        </a:xfrm>
+      </p:grpSpPr>
+      <p:sp>
+        <p:nvSpPr>
+          <p:cNvPr id="4" name="Slide Number Placeholder 3">
+            <a:extLst>
+              <a:ext uri="{FF2B5EF4-FFF2-40B4-BE49-F238E27FC236}">
+                <a16:creationId xmlns:a16="http://schemas.microsoft.com/office/drawing/2014/main" id="{EC299819-CD8E-EB34-18BD-85D66D0BCA6D}"/>
+              </a:ext>
+            </a:extLst>
+          </p:cNvPr>
+          <p:cNvSpPr>
+            <a:spLocks noGrp="1"/>
+          </p:cNvSpPr>
+          <p:nvPr>
+            <p:ph type="sldNum" sz="quarter" idx="4"/>
+          </p:nvPr>
+        </p:nvSpPr>
+        <p:spPr/>
+        <p:txBody>
+          <a:bodyPr/>
+          <a:lstStyle/>
+          <a:p>
+            <a:fld id="{71B8893A-F325-44A6-8EFB-883C20332CFE}" type="slidenum">
+              <a:rPr lang="en-US" smtClean="0"/>
+              <a:pPr/>
+              <a:t>21</a:t>
+            </a:fld>
+            <a:endParaRPr lang="en-US"/>
+          </a:p>
+        </p:txBody>
+      </p:sp>
+      <p:sp>
+        <p:nvSpPr>
+          <p:cNvPr id="3" name="Title 2">
+            <a:extLst>
+              <a:ext uri="{FF2B5EF4-FFF2-40B4-BE49-F238E27FC236}">
+                <a16:creationId xmlns:a16="http://schemas.microsoft.com/office/drawing/2014/main" id="{7B49E369-9E9C-9BA9-6390-88D2193C9837}"/>
+              </a:ext>
+            </a:extLst>
+          </p:cNvPr>
+          <p:cNvSpPr>
+            <a:spLocks noGrp="1"/>
+          </p:cNvSpPr>
+          <p:nvPr>
+            <p:ph type="title"/>
+          </p:nvPr>
+        </p:nvSpPr>
+        <p:spPr>
+          <a:xfrm>
+            <a:off x="568713" y="1411575"/>
+            <a:ext cx="7898780" cy="857250"/>
+          </a:xfrm>
+        </p:spPr>
+        <p:txBody>
+          <a:bodyPr/>
+          <a:lstStyle/>
+          <a:p>
+            <a:pPr marL="342900" indent="-342900">
+              <a:buSzPct val="100000"/>
+              <a:buFont typeface="+mj-lt"/>
+              <a:buAutoNum type="arabicPeriod"/>
+            </a:pPr>
+            <a:r>
+              <a:rPr lang="en-US" sz="1800" b="1" dirty="0"/>
+              <a:t>Defaults must come after required parameters.</a:t>
+            </a:r>
+            <a:r>
+              <a:rPr lang="en-US" sz="1800" dirty="0"/>
+              <a:t> Python needs to know which arguments belong where, so this is illegal.</a:t>
+            </a:r>
+            <a:br>
+              <a:rPr lang="en-US" sz="1800" dirty="0"/>
+            </a:br>
+            <a:br>
+              <a:rPr lang="en-US" sz="1800" dirty="0"/>
+            </a:br>
+            <a:br>
+              <a:rPr lang="en-US" sz="1800" dirty="0"/>
+            </a:br>
+            <a:br>
+              <a:rPr lang="en-US" sz="1800" dirty="0"/>
+            </a:br>
+            <a:br>
+              <a:rPr lang="en-US" sz="1800" dirty="0"/>
+            </a:br>
+            <a:br>
+              <a:rPr lang="en-US" sz="1800" dirty="0"/>
+            </a:br>
+            <a:br>
+              <a:rPr lang="en-US" sz="1800" dirty="0"/>
+            </a:br>
+            <a:endParaRPr lang="en-US" sz="1800" dirty="0"/>
+          </a:p>
+        </p:txBody>
+      </p:sp>
+      <p:sp>
+        <p:nvSpPr>
+          <p:cNvPr id="2" name="Title 1">
+            <a:extLst>
+              <a:ext uri="{FF2B5EF4-FFF2-40B4-BE49-F238E27FC236}">
+                <a16:creationId xmlns:a16="http://schemas.microsoft.com/office/drawing/2014/main" id="{D945A404-23A7-49E9-C8B9-7F860285B5CE}"/>
+              </a:ext>
+            </a:extLst>
+          </p:cNvPr>
+          <p:cNvSpPr txBox="1">
+            <a:spLocks/>
+          </p:cNvSpPr>
+          <p:nvPr/>
+        </p:nvSpPr>
+        <p:spPr>
+          <a:xfrm>
+            <a:off x="505521" y="651068"/>
+            <a:ext cx="7961972" cy="585207"/>
+          </a:xfrm>
+          <a:prstGeom prst="rect">
+            <a:avLst/>
+          </a:prstGeom>
+          <a:noFill/>
+          <a:ln>
+            <a:noFill/>
+          </a:ln>
+        </p:spPr>
+        <p:txBody>
+          <a:bodyPr spcFirstLastPara="1" wrap="square" lIns="0" tIns="0" rIns="0" bIns="0" anchor="t" anchorCtr="0">
+            <a:noAutofit/>
+          </a:bodyPr>
+          <a:lstStyle>
+            <a:defPPr marR="0" lvl="0" algn="l" rtl="0">
+              <a:lnSpc>
+                <a:spcPct val="100000"/>
+              </a:lnSpc>
+              <a:spcBef>
+                <a:spcPts val="0"/>
+              </a:spcBef>
+              <a:spcAft>
+                <a:spcPts val="0"/>
+              </a:spcAft>
+            </a:defPPr>
+            <a:lvl1pPr marR="0" lvl="0" algn="l" rtl="0">
+              <a:lnSpc>
+                <a:spcPct val="90000"/>
+              </a:lnSpc>
+              <a:spcBef>
+                <a:spcPts val="0"/>
+              </a:spcBef>
+              <a:spcAft>
+                <a:spcPts val="0"/>
+              </a:spcAft>
+              <a:buClr>
+                <a:schemeClr val="dk1"/>
+              </a:buClr>
+              <a:buSzPts val="2400"/>
+              <a:buFont typeface="Arial"/>
+              <a:buNone/>
+              <a:defRPr sz="2400" b="0" i="0" u="none" strike="noStrike" cap="none">
+                <a:solidFill>
+                  <a:schemeClr val="dk1"/>
+                </a:solidFill>
+                <a:latin typeface="Arial"/>
+                <a:ea typeface="Arial"/>
+                <a:cs typeface="Arial"/>
+                <a:sym typeface="Arial"/>
+              </a:defRPr>
+            </a:lvl1pPr>
+            <a:lvl2pPr marR="0" lvl="1" algn="l" rtl="0">
+              <a:lnSpc>
+                <a:spcPct val="100000"/>
+              </a:lnSpc>
+              <a:spcBef>
+                <a:spcPts val="0"/>
+              </a:spcBef>
+              <a:spcAft>
+                <a:spcPts val="0"/>
+              </a:spcAft>
+              <a:buClr>
+                <a:srgbClr val="000000"/>
+              </a:buClr>
+              <a:buSzPts val="1400"/>
+              <a:buFont typeface="Arial"/>
+              <a:buNone/>
+              <a:defRPr sz="1800" b="0" i="0" u="none" strike="noStrike" cap="none">
+                <a:solidFill>
+                  <a:srgbClr val="000000"/>
+                </a:solidFill>
+                <a:latin typeface="Arial"/>
+                <a:ea typeface="Arial"/>
+                <a:cs typeface="Arial"/>
+                <a:sym typeface="Arial"/>
+              </a:defRPr>
+            </a:lvl2pPr>
+            <a:lvl3pPr marR="0" lvl="2" algn="l" rtl="0">
+              <a:lnSpc>
+                <a:spcPct val="100000"/>
+              </a:lnSpc>
+              <a:spcBef>
+                <a:spcPts val="0"/>
+              </a:spcBef>
+              <a:spcAft>
+                <a:spcPts val="0"/>
+              </a:spcAft>
+              <a:buClr>
+                <a:srgbClr val="000000"/>
+              </a:buClr>
+              <a:buSzPts val="1400"/>
+              <a:buFont typeface="Arial"/>
+              <a:buNone/>
+              <a:defRPr sz="1800" b="0" i="0" u="none" strike="noStrike" cap="none">
+                <a:solidFill>
+                  <a:srgbClr val="000000"/>
+                </a:solidFill>
+                <a:latin typeface="Arial"/>
+                <a:ea typeface="Arial"/>
+                <a:cs typeface="Arial"/>
+                <a:sym typeface="Arial"/>
+              </a:defRPr>
+            </a:lvl3pPr>
+            <a:lvl4pPr marR="0" lvl="3" algn="l" rtl="0">
+              <a:lnSpc>
+                <a:spcPct val="100000"/>
+              </a:lnSpc>
+              <a:spcBef>
+                <a:spcPts val="0"/>
+              </a:spcBef>
+              <a:spcAft>
+                <a:spcPts val="0"/>
+              </a:spcAft>
+              <a:buClr>
+                <a:srgbClr val="000000"/>
+              </a:buClr>
+              <a:buSzPts val="1400"/>
+              <a:buFont typeface="Arial"/>
+              <a:buNone/>
+              <a:defRPr sz="1800" b="0" i="0" u="none" strike="noStrike" cap="none">
+                <a:solidFill>
+                  <a:srgbClr val="000000"/>
+                </a:solidFill>
+                <a:latin typeface="Arial"/>
+                <a:ea typeface="Arial"/>
+                <a:cs typeface="Arial"/>
+                <a:sym typeface="Arial"/>
+              </a:defRPr>
+            </a:lvl4pPr>
+            <a:lvl5pPr marR="0" lvl="4" algn="l" rtl="0">
+              <a:lnSpc>
+                <a:spcPct val="100000"/>
+              </a:lnSpc>
+              <a:spcBef>
+                <a:spcPts val="0"/>
+              </a:spcBef>
+              <a:spcAft>
+                <a:spcPts val="0"/>
+              </a:spcAft>
+              <a:buClr>
+                <a:srgbClr val="000000"/>
+              </a:buClr>
+              <a:buSzPts val="1400"/>
+              <a:buFont typeface="Arial"/>
+              <a:buNone/>
+              <a:defRPr sz="1800" b="0" i="0" u="none" strike="noStrike" cap="none">
+                <a:solidFill>
+                  <a:srgbClr val="000000"/>
+                </a:solidFill>
+                <a:latin typeface="Arial"/>
+                <a:ea typeface="Arial"/>
+                <a:cs typeface="Arial"/>
+                <a:sym typeface="Arial"/>
+              </a:defRPr>
+            </a:lvl5pPr>
+            <a:lvl6pPr marR="0" lvl="5" algn="l" rtl="0">
+              <a:lnSpc>
+                <a:spcPct val="100000"/>
+              </a:lnSpc>
+              <a:spcBef>
+                <a:spcPts val="0"/>
+              </a:spcBef>
+              <a:spcAft>
+                <a:spcPts val="0"/>
+              </a:spcAft>
+              <a:buClr>
+                <a:srgbClr val="000000"/>
+              </a:buClr>
+              <a:buSzPts val="1400"/>
+              <a:buFont typeface="Arial"/>
+              <a:buNone/>
+              <a:defRPr sz="1800" b="0" i="0" u="none" strike="noStrike" cap="none">
+                <a:solidFill>
+                  <a:srgbClr val="000000"/>
+                </a:solidFill>
+                <a:latin typeface="Arial"/>
+                <a:ea typeface="Arial"/>
+                <a:cs typeface="Arial"/>
+                <a:sym typeface="Arial"/>
+              </a:defRPr>
+            </a:lvl6pPr>
+            <a:lvl7pPr marR="0" lvl="6" algn="l" rtl="0">
+              <a:lnSpc>
+                <a:spcPct val="100000"/>
+              </a:lnSpc>
+              <a:spcBef>
+                <a:spcPts val="0"/>
+              </a:spcBef>
+              <a:spcAft>
+                <a:spcPts val="0"/>
+              </a:spcAft>
+              <a:buClr>
+                <a:srgbClr val="000000"/>
+              </a:buClr>
+              <a:buSzPts val="1400"/>
+              <a:buFont typeface="Arial"/>
+              <a:buNone/>
+              <a:defRPr sz="1800" b="0" i="0" u="none" strike="noStrike" cap="none">
+                <a:solidFill>
+                  <a:srgbClr val="000000"/>
+                </a:solidFill>
+                <a:latin typeface="Arial"/>
+                <a:ea typeface="Arial"/>
+                <a:cs typeface="Arial"/>
+                <a:sym typeface="Arial"/>
+              </a:defRPr>
+            </a:lvl7pPr>
+            <a:lvl8pPr marR="0" lvl="7" algn="l" rtl="0">
+              <a:lnSpc>
+                <a:spcPct val="100000"/>
+              </a:lnSpc>
+              <a:spcBef>
+                <a:spcPts val="0"/>
+              </a:spcBef>
+              <a:spcAft>
+                <a:spcPts val="0"/>
+              </a:spcAft>
+              <a:buClr>
+                <a:srgbClr val="000000"/>
+              </a:buClr>
+              <a:buSzPts val="1400"/>
+              <a:buFont typeface="Arial"/>
+              <a:buNone/>
+              <a:defRPr sz="1800" b="0" i="0" u="none" strike="noStrike" cap="none">
+                <a:solidFill>
+                  <a:srgbClr val="000000"/>
+                </a:solidFill>
+                <a:latin typeface="Arial"/>
+                <a:ea typeface="Arial"/>
+                <a:cs typeface="Arial"/>
+                <a:sym typeface="Arial"/>
+              </a:defRPr>
+            </a:lvl8pPr>
+            <a:lvl9pPr marR="0" lvl="8" algn="l" rtl="0">
+              <a:lnSpc>
+                <a:spcPct val="100000"/>
+              </a:lnSpc>
+              <a:spcBef>
+                <a:spcPts val="0"/>
+              </a:spcBef>
+              <a:spcAft>
+                <a:spcPts val="0"/>
+              </a:spcAft>
+              <a:buClr>
+                <a:srgbClr val="000000"/>
+              </a:buClr>
+              <a:buSzPts val="1400"/>
+              <a:buFont typeface="Arial"/>
+              <a:buNone/>
+              <a:defRPr sz="1800" b="0" i="0" u="none" strike="noStrike" cap="none">
+                <a:solidFill>
+                  <a:srgbClr val="000000"/>
+                </a:solidFill>
+                <a:latin typeface="Arial"/>
+                <a:ea typeface="Arial"/>
+                <a:cs typeface="Arial"/>
+                <a:sym typeface="Arial"/>
+              </a:defRPr>
+            </a:lvl9pPr>
+          </a:lstStyle>
+          <a:p>
+            <a:r>
+              <a:rPr lang="en-US" dirty="0"/>
+              <a:t>Functions with default parameters</a:t>
+            </a:r>
+          </a:p>
+        </p:txBody>
+      </p:sp>
+      <p:sp>
+        <p:nvSpPr>
+          <p:cNvPr id="8" name="TextBox 7">
+            <a:extLst>
+              <a:ext uri="{FF2B5EF4-FFF2-40B4-BE49-F238E27FC236}">
+                <a16:creationId xmlns:a16="http://schemas.microsoft.com/office/drawing/2014/main" id="{51A1FDCD-B09B-9CCE-0F8D-9235AF052F2D}"/>
+              </a:ext>
+            </a:extLst>
+          </p:cNvPr>
+          <p:cNvSpPr txBox="1"/>
+          <p:nvPr/>
+        </p:nvSpPr>
+        <p:spPr>
+          <a:xfrm>
+            <a:off x="553845" y="2110085"/>
+            <a:ext cx="8021442" cy="646331"/>
+          </a:xfrm>
+          <a:prstGeom prst="rect">
+            <a:avLst/>
+          </a:prstGeom>
+          <a:noFill/>
+        </p:spPr>
+        <p:txBody>
+          <a:bodyPr wrap="square">
+            <a:spAutoFit/>
+          </a:bodyPr>
+          <a:lstStyle/>
+          <a:p>
+            <a:r>
+              <a:rPr lang="en-US" sz="1800" b="1" dirty="0"/>
+              <a:t>2. Arguments are matched by position first, then by keyword.</a:t>
+            </a:r>
+            <a:r>
+              <a:rPr lang="en-US" sz="1800" dirty="0"/>
+              <a:t> When calling a function, you can pass arguments positionally (in order) or by name</a:t>
+            </a:r>
+            <a:endParaRPr lang="en-US" dirty="0"/>
+          </a:p>
+        </p:txBody>
+      </p:sp>
+      <p:sp>
+        <p:nvSpPr>
+          <p:cNvPr id="10" name="TextBox 9">
+            <a:extLst>
+              <a:ext uri="{FF2B5EF4-FFF2-40B4-BE49-F238E27FC236}">
+                <a16:creationId xmlns:a16="http://schemas.microsoft.com/office/drawing/2014/main" id="{94E92133-75A8-288B-A492-0282D03D61C5}"/>
+              </a:ext>
+            </a:extLst>
+          </p:cNvPr>
+          <p:cNvSpPr txBox="1"/>
+          <p:nvPr/>
+        </p:nvSpPr>
+        <p:spPr>
+          <a:xfrm>
+            <a:off x="505521" y="2268825"/>
+            <a:ext cx="8378284" cy="1969770"/>
+          </a:xfrm>
+          <a:prstGeom prst="rect">
+            <a:avLst/>
+          </a:prstGeom>
+          <a:noFill/>
+        </p:spPr>
+        <p:txBody>
+          <a:bodyPr wrap="square">
+            <a:spAutoFit/>
+          </a:bodyPr>
+          <a:lstStyle/>
+          <a:p>
+            <a:br>
+              <a:rPr lang="en-US" sz="1800" dirty="0"/>
+            </a:br>
+            <a:br>
+              <a:rPr lang="en-US" sz="1800" dirty="0"/>
+            </a:br>
+            <a:br>
+              <a:rPr lang="en-US" sz="1800" dirty="0"/>
+            </a:br>
+            <a:r>
+              <a:rPr lang="en-US" sz="1800" b="1" dirty="0"/>
+              <a:t>3. The default is used only when the argument is missing.</a:t>
+            </a:r>
+            <a:r>
+              <a:rPr lang="en-US" sz="1800" dirty="0"/>
+              <a:t> Passing a value — even the same value as the default — simply overrides it for that one call. The default itself is never changed by calling the function.</a:t>
+            </a:r>
+            <a:br>
+              <a:rPr lang="en-US" sz="1800" dirty="0"/>
+            </a:br>
+            <a:endParaRPr lang="en-US" dirty="0"/>
+          </a:p>
+        </p:txBody>
+      </p:sp>
+    </p:spTree>
+    <p:extLst>
+      <p:ext uri="{BB962C8B-B14F-4D97-AF65-F5344CB8AC3E}">
+        <p14:creationId xmlns:p14="http://schemas.microsoft.com/office/powerpoint/2010/main" val="383956221"/>
+      </p:ext>
+    </p:extLst>
+  </p:cSld>
+  <p:clrMapOvr>
+    <a:masterClrMapping/>
+  </p:clrMapOvr>
+  <p:timing>
+    <p:tnLst>
+      <p:par>
+        <p:cTn id="1" dur="indefinite" restart="never" nodeType="tmRoot">
+          <p:childTnLst>
+            <p:seq concurrent="1" nextAc="seek">
+              <p:cTn id="2" dur="indefinite" nodeType="mainSeq">
+                <p:childTnLst>
+                  <p:par>
+                    <p:cTn id="3" fill="hold">
+                      <p:stCondLst>
+                        <p:cond delay="indefinite"/>
+                      </p:stCondLst>
+                      <p:childTnLst>
+                        <p:par>
+                          <p:cTn id="4" fill="hold">
+                            <p:stCondLst>
+                              <p:cond delay="0"/>
+                            </p:stCondLst>
+                            <p:childTnLst>
+                              <p:par>
+                                <p:cTn id="5" presetID="1" presetClass="entr" presetSubtype="0" fill="hold" grpId="0" nodeType="clickEffect">
+                                  <p:stCondLst>
+                                    <p:cond delay="0"/>
+                                  </p:stCondLst>
+                                  <p:childTnLst>
+                                    <p:set>
+                                      <p:cBhvr>
+                                        <p:cTn id="6" dur="1" fill="hold">
+                                          <p:stCondLst>
+                                            <p:cond delay="0"/>
+                                          </p:stCondLst>
+                                        </p:cTn>
+                                        <p:tgtEl>
+                                          <p:spTgt spid="3"/>
+                                        </p:tgtEl>
+                                        <p:attrNameLst>
+                                          <p:attrName>style.visibility</p:attrName>
+                                        </p:attrNameLst>
+                                      </p:cBhvr>
+                                      <p:to>
+                                        <p:strVal val="visible"/>
+                                      </p:to>
+                                    </p:set>
+                                  </p:childTnLst>
+                                </p:cTn>
+                              </p:par>
+                            </p:childTnLst>
+                          </p:cTn>
+                        </p:par>
+                      </p:childTnLst>
+                    </p:cTn>
+                  </p:par>
+                  <p:par>
+                    <p:cTn id="7" fill="hold">
+                      <p:stCondLst>
+                        <p:cond delay="indefinite"/>
+                      </p:stCondLst>
+                      <p:childTnLst>
+                        <p:par>
+                          <p:cTn id="8" fill="hold">
+                            <p:stCondLst>
+                              <p:cond delay="0"/>
+                            </p:stCondLst>
+                            <p:childTnLst>
+                              <p:par>
+                                <p:cTn id="9" presetID="1" presetClass="entr" presetSubtype="0" fill="hold" grpId="0" nodeType="clickEffect">
+                                  <p:stCondLst>
+                                    <p:cond delay="0"/>
+                                  </p:stCondLst>
+                                  <p:childTnLst>
+                                    <p:set>
+                                      <p:cBhvr>
+                                        <p:cTn id="10" dur="1" fill="hold">
+                                          <p:stCondLst>
+                                            <p:cond delay="0"/>
+                                          </p:stCondLst>
+                                        </p:cTn>
+                                        <p:tgtEl>
+                                          <p:spTgt spid="8"/>
+                                        </p:tgtEl>
+                                        <p:attrNameLst>
+                                          <p:attrName>style.visibility</p:attrName>
+                                        </p:attrNameLst>
+                                      </p:cBhvr>
+                                      <p:to>
+                                        <p:strVal val="visible"/>
+                                      </p:to>
+                                    </p:set>
+                                  </p:childTnLst>
+                                </p:cTn>
+                              </p:par>
+                            </p:childTnLst>
+                          </p:cTn>
+                        </p:par>
+                      </p:childTnLst>
+                    </p:cTn>
+                  </p:par>
+                  <p:par>
+                    <p:cTn id="11" fill="hold">
+                      <p:stCondLst>
+                        <p:cond delay="indefinite"/>
+                      </p:stCondLst>
+                      <p:childTnLst>
+                        <p:par>
+                          <p:cTn id="12" fill="hold">
+                            <p:stCondLst>
+                              <p:cond delay="0"/>
+                            </p:stCondLst>
+                            <p:childTnLst>
+                              <p:par>
+                                <p:cTn id="13" presetID="1" presetClass="entr" presetSubtype="0" fill="hold" grpId="0" nodeType="clickEffect">
+                                  <p:stCondLst>
+                                    <p:cond delay="0"/>
+                                  </p:stCondLst>
+                                  <p:childTnLst>
+                                    <p:set>
+                                      <p:cBhvr>
+                                        <p:cTn id="14" dur="1" fill="hold">
+                                          <p:stCondLst>
+                                            <p:cond delay="0"/>
+                                          </p:stCondLst>
+                                        </p:cTn>
+                                        <p:tgtEl>
+                                          <p:spTgt spid="10"/>
+                                        </p:tgtEl>
+                                        <p:attrNameLst>
+                                          <p:attrName>style.visibility</p:attrName>
+                                        </p:attrNameLst>
+                                      </p:cBhvr>
+                                      <p:to>
+                                        <p:strVal val="visible"/>
+                                      </p:to>
+                                    </p:set>
+                                  </p:childTnLst>
+                                </p:cTn>
+                              </p:par>
+                            </p:childTnLst>
+                          </p:cTn>
+                        </p:par>
+                      </p:childTnLst>
+                    </p:cTn>
+                  </p:par>
+                </p:childTnLst>
+              </p:cTn>
+              <p:prevCondLst>
+                <p:cond evt="onPrev" delay="0">
+                  <p:tgtEl>
+                    <p:sldTgt/>
+                  </p:tgtEl>
+                </p:cond>
+              </p:prevCondLst>
+              <p:nextCondLst>
+                <p:cond evt="onNext" delay="0">
+                  <p:tgtEl>
+                    <p:sldTgt/>
+                  </p:tgtEl>
+                </p:cond>
+              </p:nextCondLst>
+            </p:seq>
+          </p:childTnLst>
+        </p:cTn>
+      </p:par>
+    </p:tnLst>
+    <p:bldLst>
+      <p:bldP spid="3" grpId="0"/>
+      <p:bldP spid="8" grpId="0"/>
+      <p:bldP spid="10" grpId="0"/>
+    </p:bldLst>
+  </p:timing>
+</p:sld>
+</file>
+
+<file path=ppt/slides/slide22.xml><?xml version="1.0" encoding="utf-8"?>
+<p:sld xmlns:a="http://schemas.openxmlformats.org/drawingml/2006/main" xmlns:r="http://schemas.openxmlformats.org/officeDocument/2006/relationships" xmlns:p="http://schemas.openxmlformats.org/presentationml/2006/main">
+  <p:cSld>
+    <p:spTree>
+      <p:nvGrpSpPr>
+        <p:cNvPr id="1" name="">
+          <a:extLst>
+            <a:ext uri="{FF2B5EF4-FFF2-40B4-BE49-F238E27FC236}">
+              <a16:creationId xmlns:a16="http://schemas.microsoft.com/office/drawing/2014/main" id="{2DF9DD5D-667D-B3F7-1C56-9944B393542D}"/>
+            </a:ext>
+          </a:extLst>
+        </p:cNvPr>
+        <p:cNvGrpSpPr/>
+        <p:nvPr/>
+      </p:nvGrpSpPr>
+      <p:grpSpPr>
+        <a:xfrm>
+          <a:off x="0" y="0"/>
+          <a:ext cx="0" cy="0"/>
+          <a:chOff x="0" y="0"/>
+          <a:chExt cx="0" cy="0"/>
+        </a:xfrm>
+      </p:grpSpPr>
+      <p:sp>
+        <p:nvSpPr>
+          <p:cNvPr id="4" name="Slide Number Placeholder 3">
+            <a:extLst>
+              <a:ext uri="{FF2B5EF4-FFF2-40B4-BE49-F238E27FC236}">
+                <a16:creationId xmlns:a16="http://schemas.microsoft.com/office/drawing/2014/main" id="{B1707059-C7B5-BC9A-3F40-FE09269626B8}"/>
+              </a:ext>
+            </a:extLst>
+          </p:cNvPr>
+          <p:cNvSpPr>
+            <a:spLocks noGrp="1"/>
+          </p:cNvSpPr>
+          <p:nvPr>
+            <p:ph type="sldNum" sz="quarter" idx="4"/>
+          </p:nvPr>
+        </p:nvSpPr>
+        <p:spPr/>
+        <p:txBody>
+          <a:bodyPr/>
+          <a:lstStyle/>
+          <a:p>
+            <a:fld id="{71B8893A-F325-44A6-8EFB-883C20332CFE}" type="slidenum">
+              <a:rPr lang="en-US" smtClean="0"/>
+              <a:pPr/>
+              <a:t>22</a:t>
+            </a:fld>
+            <a:endParaRPr lang="en-US"/>
+          </a:p>
+        </p:txBody>
+      </p:sp>
+      <p:sp>
+        <p:nvSpPr>
+          <p:cNvPr id="3" name="Title 2">
+            <a:extLst>
+              <a:ext uri="{FF2B5EF4-FFF2-40B4-BE49-F238E27FC236}">
+                <a16:creationId xmlns:a16="http://schemas.microsoft.com/office/drawing/2014/main" id="{B7BE63EC-7EA8-C7A8-654A-6CA54F0C35E9}"/>
+              </a:ext>
+            </a:extLst>
+          </p:cNvPr>
+          <p:cNvSpPr>
+            <a:spLocks noGrp="1"/>
+          </p:cNvSpPr>
+          <p:nvPr>
+            <p:ph type="title"/>
+          </p:nvPr>
+        </p:nvSpPr>
+        <p:spPr>
+          <a:xfrm>
+            <a:off x="568713" y="1411575"/>
+            <a:ext cx="7898780" cy="857250"/>
+          </a:xfrm>
+        </p:spPr>
+        <p:txBody>
+          <a:bodyPr/>
+          <a:lstStyle/>
+          <a:p>
+            <a:pPr>
+              <a:buSzPct val="100000"/>
+            </a:pPr>
+            <a:r>
+              <a:rPr lang="en-US" sz="2000" dirty="0"/>
+              <a:t>Write </a:t>
+            </a:r>
+            <a:r>
+              <a:rPr lang="en-US" sz="2000" b="1" dirty="0" err="1"/>
+              <a:t>curve_grades</a:t>
+            </a:r>
+            <a:r>
+              <a:rPr lang="en-US" sz="2000" b="1" dirty="0"/>
+              <a:t>(scores, bonus=5, </a:t>
+            </a:r>
+            <a:r>
+              <a:rPr lang="en-US" sz="2000" b="1" dirty="0" err="1"/>
+              <a:t>max_score</a:t>
+            </a:r>
+            <a:r>
+              <a:rPr lang="en-US" sz="2000" b="1" dirty="0"/>
+              <a:t>=100)</a:t>
+            </a:r>
+            <a:r>
+              <a:rPr lang="en-US" sz="2000" dirty="0"/>
+              <a:t> that takes a list of scores and returns a new list where each score gets the bonus added, but no score exceeds </a:t>
+            </a:r>
+            <a:r>
+              <a:rPr lang="en-US" sz="2000" dirty="0" err="1"/>
+              <a:t>max_score</a:t>
+            </a:r>
+            <a:r>
+              <a:rPr lang="en-US" sz="2000" dirty="0"/>
+              <a:t>. </a:t>
+            </a:r>
+            <a:br>
+              <a:rPr lang="en-US" sz="1800" dirty="0"/>
+            </a:br>
+            <a:br>
+              <a:rPr lang="en-US" sz="1800" dirty="0"/>
+            </a:br>
+            <a:br>
+              <a:rPr lang="en-US" sz="2000" dirty="0"/>
+            </a:br>
+            <a:r>
+              <a:rPr lang="en-US" sz="2000" dirty="0"/>
+              <a:t>Example: </a:t>
+            </a:r>
+            <a:r>
+              <a:rPr lang="en-US" sz="2000" dirty="0" err="1"/>
+              <a:t>curve_grades</a:t>
+            </a:r>
+            <a:r>
+              <a:rPr lang="en-US" sz="2000" dirty="0"/>
+              <a:t>([88, 97, 75]) → [93, 100, 80].</a:t>
+            </a:r>
+            <a:br>
+              <a:rPr lang="en-US" sz="2000" dirty="0"/>
+            </a:br>
+            <a:br>
+              <a:rPr lang="en-US" sz="1800" dirty="0"/>
+            </a:br>
+            <a:br>
+              <a:rPr lang="en-US" sz="1800" dirty="0"/>
+            </a:br>
+            <a:br>
+              <a:rPr lang="en-US" sz="1800" dirty="0"/>
+            </a:br>
+            <a:br>
+              <a:rPr lang="en-US" sz="1800" dirty="0"/>
+            </a:br>
+            <a:br>
+              <a:rPr lang="en-US" sz="1800" dirty="0"/>
+            </a:br>
+            <a:endParaRPr lang="en-US" sz="1800" dirty="0"/>
+          </a:p>
+        </p:txBody>
+      </p:sp>
+      <p:sp>
+        <p:nvSpPr>
+          <p:cNvPr id="2" name="Title 1">
+            <a:extLst>
+              <a:ext uri="{FF2B5EF4-FFF2-40B4-BE49-F238E27FC236}">
+                <a16:creationId xmlns:a16="http://schemas.microsoft.com/office/drawing/2014/main" id="{94190FDC-3F8B-755E-81B7-FEE7326DC3FD}"/>
+              </a:ext>
+            </a:extLst>
+          </p:cNvPr>
+          <p:cNvSpPr txBox="1">
+            <a:spLocks/>
+          </p:cNvSpPr>
+          <p:nvPr/>
+        </p:nvSpPr>
+        <p:spPr>
+          <a:xfrm>
+            <a:off x="505521" y="591595"/>
+            <a:ext cx="7961972" cy="585207"/>
+          </a:xfrm>
+          <a:prstGeom prst="rect">
+            <a:avLst/>
+          </a:prstGeom>
+          <a:noFill/>
+          <a:ln>
+            <a:noFill/>
+          </a:ln>
+        </p:spPr>
+        <p:txBody>
+          <a:bodyPr spcFirstLastPara="1" wrap="square" lIns="0" tIns="0" rIns="0" bIns="0" anchor="t" anchorCtr="0">
+            <a:noAutofit/>
+          </a:bodyPr>
+          <a:lstStyle>
+            <a:defPPr marR="0" lvl="0" algn="l" rtl="0">
+              <a:lnSpc>
+                <a:spcPct val="100000"/>
+              </a:lnSpc>
+              <a:spcBef>
+                <a:spcPts val="0"/>
+              </a:spcBef>
+              <a:spcAft>
+                <a:spcPts val="0"/>
+              </a:spcAft>
+            </a:defPPr>
+            <a:lvl1pPr marR="0" lvl="0" algn="l" rtl="0">
+              <a:lnSpc>
+                <a:spcPct val="90000"/>
+              </a:lnSpc>
+              <a:spcBef>
+                <a:spcPts val="0"/>
+              </a:spcBef>
+              <a:spcAft>
+                <a:spcPts val="0"/>
+              </a:spcAft>
+              <a:buClr>
+                <a:schemeClr val="dk1"/>
+              </a:buClr>
+              <a:buSzPts val="2400"/>
+              <a:buFont typeface="Arial"/>
+              <a:buNone/>
+              <a:defRPr sz="2400" b="0" i="0" u="none" strike="noStrike" cap="none">
+                <a:solidFill>
+                  <a:schemeClr val="dk1"/>
+                </a:solidFill>
+                <a:latin typeface="Arial"/>
+                <a:ea typeface="Arial"/>
+                <a:cs typeface="Arial"/>
+                <a:sym typeface="Arial"/>
+              </a:defRPr>
+            </a:lvl1pPr>
+            <a:lvl2pPr marR="0" lvl="1" algn="l" rtl="0">
+              <a:lnSpc>
+                <a:spcPct val="100000"/>
+              </a:lnSpc>
+              <a:spcBef>
+                <a:spcPts val="0"/>
+              </a:spcBef>
+              <a:spcAft>
+                <a:spcPts val="0"/>
+              </a:spcAft>
+              <a:buClr>
+                <a:srgbClr val="000000"/>
+              </a:buClr>
+              <a:buSzPts val="1400"/>
+              <a:buFont typeface="Arial"/>
+              <a:buNone/>
+              <a:defRPr sz="1800" b="0" i="0" u="none" strike="noStrike" cap="none">
+                <a:solidFill>
+                  <a:srgbClr val="000000"/>
+                </a:solidFill>
+                <a:latin typeface="Arial"/>
+                <a:ea typeface="Arial"/>
+                <a:cs typeface="Arial"/>
+                <a:sym typeface="Arial"/>
+              </a:defRPr>
+            </a:lvl2pPr>
+            <a:lvl3pPr marR="0" lvl="2" algn="l" rtl="0">
+              <a:lnSpc>
+                <a:spcPct val="100000"/>
+              </a:lnSpc>
+              <a:spcBef>
+                <a:spcPts val="0"/>
+              </a:spcBef>
+              <a:spcAft>
+                <a:spcPts val="0"/>
+              </a:spcAft>
+              <a:buClr>
+                <a:srgbClr val="000000"/>
+              </a:buClr>
+              <a:buSzPts val="1400"/>
+              <a:buFont typeface="Arial"/>
+              <a:buNone/>
+              <a:defRPr sz="1800" b="0" i="0" u="none" strike="noStrike" cap="none">
+                <a:solidFill>
+                  <a:srgbClr val="000000"/>
+                </a:solidFill>
+                <a:latin typeface="Arial"/>
+                <a:ea typeface="Arial"/>
+                <a:cs typeface="Arial"/>
+                <a:sym typeface="Arial"/>
+              </a:defRPr>
+            </a:lvl3pPr>
+            <a:lvl4pPr marR="0" lvl="3" algn="l" rtl="0">
+              <a:lnSpc>
+                <a:spcPct val="100000"/>
+              </a:lnSpc>
+              <a:spcBef>
+                <a:spcPts val="0"/>
+              </a:spcBef>
+              <a:spcAft>
+                <a:spcPts val="0"/>
+              </a:spcAft>
+              <a:buClr>
+                <a:srgbClr val="000000"/>
+              </a:buClr>
+              <a:buSzPts val="1400"/>
+              <a:buFont typeface="Arial"/>
+              <a:buNone/>
+              <a:defRPr sz="1800" b="0" i="0" u="none" strike="noStrike" cap="none">
+                <a:solidFill>
+                  <a:srgbClr val="000000"/>
+                </a:solidFill>
+                <a:latin typeface="Arial"/>
+                <a:ea typeface="Arial"/>
+                <a:cs typeface="Arial"/>
+                <a:sym typeface="Arial"/>
+              </a:defRPr>
+            </a:lvl4pPr>
+            <a:lvl5pPr marR="0" lvl="4" algn="l" rtl="0">
+              <a:lnSpc>
+                <a:spcPct val="100000"/>
+              </a:lnSpc>
+              <a:spcBef>
+                <a:spcPts val="0"/>
+              </a:spcBef>
+              <a:spcAft>
+                <a:spcPts val="0"/>
+              </a:spcAft>
+              <a:buClr>
+                <a:srgbClr val="000000"/>
+              </a:buClr>
+              <a:buSzPts val="1400"/>
+              <a:buFont typeface="Arial"/>
+              <a:buNone/>
+              <a:defRPr sz="1800" b="0" i="0" u="none" strike="noStrike" cap="none">
+                <a:solidFill>
+                  <a:srgbClr val="000000"/>
+                </a:solidFill>
+                <a:latin typeface="Arial"/>
+                <a:ea typeface="Arial"/>
+                <a:cs typeface="Arial"/>
+                <a:sym typeface="Arial"/>
+              </a:defRPr>
+            </a:lvl5pPr>
+            <a:lvl6pPr marR="0" lvl="5" algn="l" rtl="0">
+              <a:lnSpc>
+                <a:spcPct val="100000"/>
+              </a:lnSpc>
+              <a:spcBef>
+                <a:spcPts val="0"/>
+              </a:spcBef>
+              <a:spcAft>
+                <a:spcPts val="0"/>
+              </a:spcAft>
+              <a:buClr>
+                <a:srgbClr val="000000"/>
+              </a:buClr>
+              <a:buSzPts val="1400"/>
+              <a:buFont typeface="Arial"/>
+              <a:buNone/>
+              <a:defRPr sz="1800" b="0" i="0" u="none" strike="noStrike" cap="none">
+                <a:solidFill>
+                  <a:srgbClr val="000000"/>
+                </a:solidFill>
+                <a:latin typeface="Arial"/>
+                <a:ea typeface="Arial"/>
+                <a:cs typeface="Arial"/>
+                <a:sym typeface="Arial"/>
+              </a:defRPr>
+            </a:lvl6pPr>
+            <a:lvl7pPr marR="0" lvl="6" algn="l" rtl="0">
+              <a:lnSpc>
+                <a:spcPct val="100000"/>
+              </a:lnSpc>
+              <a:spcBef>
+                <a:spcPts val="0"/>
+              </a:spcBef>
+              <a:spcAft>
+                <a:spcPts val="0"/>
+              </a:spcAft>
+              <a:buClr>
+                <a:srgbClr val="000000"/>
+              </a:buClr>
+              <a:buSzPts val="1400"/>
+              <a:buFont typeface="Arial"/>
+              <a:buNone/>
+              <a:defRPr sz="1800" b="0" i="0" u="none" strike="noStrike" cap="none">
+                <a:solidFill>
+                  <a:srgbClr val="000000"/>
+                </a:solidFill>
+                <a:latin typeface="Arial"/>
+                <a:ea typeface="Arial"/>
+                <a:cs typeface="Arial"/>
+                <a:sym typeface="Arial"/>
+              </a:defRPr>
+            </a:lvl7pPr>
+            <a:lvl8pPr marR="0" lvl="7" algn="l" rtl="0">
+              <a:lnSpc>
+                <a:spcPct val="100000"/>
+              </a:lnSpc>
+              <a:spcBef>
+                <a:spcPts val="0"/>
+              </a:spcBef>
+              <a:spcAft>
+                <a:spcPts val="0"/>
+              </a:spcAft>
+              <a:buClr>
+                <a:srgbClr val="000000"/>
+              </a:buClr>
+              <a:buSzPts val="1400"/>
+              <a:buFont typeface="Arial"/>
+              <a:buNone/>
+              <a:defRPr sz="1800" b="0" i="0" u="none" strike="noStrike" cap="none">
+                <a:solidFill>
+                  <a:srgbClr val="000000"/>
+                </a:solidFill>
+                <a:latin typeface="Arial"/>
+                <a:ea typeface="Arial"/>
+                <a:cs typeface="Arial"/>
+                <a:sym typeface="Arial"/>
+              </a:defRPr>
+            </a:lvl8pPr>
+            <a:lvl9pPr marR="0" lvl="8" algn="l" rtl="0">
+              <a:lnSpc>
+                <a:spcPct val="100000"/>
+              </a:lnSpc>
+              <a:spcBef>
+                <a:spcPts val="0"/>
+              </a:spcBef>
+              <a:spcAft>
+                <a:spcPts val="0"/>
+              </a:spcAft>
+              <a:buClr>
+                <a:srgbClr val="000000"/>
+              </a:buClr>
+              <a:buSzPts val="1400"/>
+              <a:buFont typeface="Arial"/>
+              <a:buNone/>
+              <a:defRPr sz="1800" b="0" i="0" u="none" strike="noStrike" cap="none">
+                <a:solidFill>
+                  <a:srgbClr val="000000"/>
+                </a:solidFill>
+                <a:latin typeface="Arial"/>
+                <a:ea typeface="Arial"/>
+                <a:cs typeface="Arial"/>
+                <a:sym typeface="Arial"/>
+              </a:defRPr>
+            </a:lvl9pPr>
+          </a:lstStyle>
+          <a:p>
+            <a:r>
+              <a:rPr lang="en-US" dirty="0"/>
+              <a:t>Functions with default parameters practical exercise</a:t>
+            </a:r>
+          </a:p>
+        </p:txBody>
+      </p:sp>
+    </p:spTree>
+    <p:extLst>
+      <p:ext uri="{BB962C8B-B14F-4D97-AF65-F5344CB8AC3E}">
+        <p14:creationId xmlns:p14="http://schemas.microsoft.com/office/powerpoint/2010/main" val="2833829966"/>
+      </p:ext>
+    </p:extLst>
+  </p:cSld>
+  <p:clrMapOvr>
+    <a:masterClrMapping/>
+  </p:clrMapOvr>
+  <p:timing>
+    <p:tnLst>
+      <p:par>
+        <p:cTn id="1" dur="indefinite" restart="never" nodeType="tmRoot">
+          <p:childTnLst>
+            <p:seq concurrent="1" nextAc="seek">
+              <p:cTn id="2" dur="indefinite" nodeType="mainSeq">
+                <p:childTnLst>
+                  <p:par>
+                    <p:cTn id="3" fill="hold">
+                      <p:stCondLst>
+                        <p:cond delay="indefinite"/>
+                      </p:stCondLst>
+                      <p:childTnLst>
+                        <p:par>
+                          <p:cTn id="4" fill="hold">
+                            <p:stCondLst>
+                              <p:cond delay="0"/>
+                            </p:stCondLst>
+                            <p:childTnLst>
+                              <p:par>
+                                <p:cTn id="5" presetID="1" presetClass="entr" presetSubtype="0" fill="hold" grpId="0" nodeType="clickEffect">
+                                  <p:stCondLst>
+                                    <p:cond delay="0"/>
+                                  </p:stCondLst>
+                                  <p:childTnLst>
+                                    <p:set>
+                                      <p:cBhvr>
+                                        <p:cTn id="6" dur="1" fill="hold">
+                                          <p:stCondLst>
+                                            <p:cond delay="0"/>
+                                          </p:stCondLst>
+                                        </p:cTn>
+                                        <p:tgtEl>
+                                          <p:spTgt spid="3"/>
+                                        </p:tgtEl>
+                                        <p:attrNameLst>
+                                          <p:attrName>style.visibility</p:attrName>
+                                        </p:attrNameLst>
+                                      </p:cBhvr>
+                                      <p:to>
+                                        <p:strVal val="visible"/>
+                                      </p:to>
+                                    </p:set>
+                                  </p:childTnLst>
+                                </p:cTn>
+                              </p:par>
+                            </p:childTnLst>
+                          </p:cTn>
+                        </p:par>
+                      </p:childTnLst>
+                    </p:cTn>
+                  </p:par>
+                </p:childTnLst>
+              </p:cTn>
+              <p:prevCondLst>
+                <p:cond evt="onPrev" delay="0">
+                  <p:tgtEl>
+                    <p:sldTgt/>
+                  </p:tgtEl>
+                </p:cond>
+              </p:prevCondLst>
+              <p:nextCondLst>
+                <p:cond evt="onNext" delay="0">
+                  <p:tgtEl>
+                    <p:sldTgt/>
+                  </p:tgtEl>
+                </p:cond>
+              </p:nextCondLst>
+            </p:seq>
+          </p:childTnLst>
+        </p:cTn>
+      </p:par>
+    </p:tnLst>
+    <p:bldLst>
+      <p:bldP spid="3" grpId="0"/>
+    </p:bldLst>
+  </p:timing>
+</p:sld>
+</file>
+
+<file path=ppt/slides/slide23.xml><?xml version="1.0" encoding="utf-8"?>
+<p:sld xmlns:a="http://schemas.openxmlformats.org/drawingml/2006/main" xmlns:r="http://schemas.openxmlformats.org/officeDocument/2006/relationships" xmlns:p="http://schemas.openxmlformats.org/presentationml/2006/main">
+  <p:cSld>
+    <p:spTree>
+      <p:nvGrpSpPr>
+        <p:cNvPr id="1" name="">
+          <a:extLst>
+            <a:ext uri="{FF2B5EF4-FFF2-40B4-BE49-F238E27FC236}">
+              <a16:creationId xmlns:a16="http://schemas.microsoft.com/office/drawing/2014/main" id="{3FC0F1C3-3874-2AFD-ACAB-D088124D4FAF}"/>
+            </a:ext>
+          </a:extLst>
+        </p:cNvPr>
+        <p:cNvGrpSpPr/>
+        <p:nvPr/>
+      </p:nvGrpSpPr>
+      <p:grpSpPr>
+        <a:xfrm>
+          <a:off x="0" y="0"/>
+          <a:ext cx="0" cy="0"/>
+          <a:chOff x="0" y="0"/>
+          <a:chExt cx="0" cy="0"/>
+        </a:xfrm>
+      </p:grpSpPr>
+      <p:sp>
+        <p:nvSpPr>
+          <p:cNvPr id="4" name="Slide Number Placeholder 3">
+            <a:extLst>
+              <a:ext uri="{FF2B5EF4-FFF2-40B4-BE49-F238E27FC236}">
+                <a16:creationId xmlns:a16="http://schemas.microsoft.com/office/drawing/2014/main" id="{F98F4F5C-F873-B945-2F5B-C18EC49ED7C6}"/>
+              </a:ext>
+            </a:extLst>
+          </p:cNvPr>
+          <p:cNvSpPr>
+            <a:spLocks noGrp="1"/>
+          </p:cNvSpPr>
+          <p:nvPr>
+            <p:ph type="sldNum" sz="quarter" idx="4"/>
+          </p:nvPr>
+        </p:nvSpPr>
+        <p:spPr/>
+        <p:txBody>
+          <a:bodyPr/>
+          <a:lstStyle/>
+          <a:p>
+            <a:fld id="{71B8893A-F325-44A6-8EFB-883C20332CFE}" type="slidenum">
+              <a:rPr lang="en-US" smtClean="0"/>
+              <a:pPr/>
+              <a:t>23</a:t>
+            </a:fld>
+            <a:endParaRPr lang="en-US"/>
+          </a:p>
+        </p:txBody>
+      </p:sp>
+      <p:sp>
+        <p:nvSpPr>
+          <p:cNvPr id="3" name="Title 2">
+            <a:extLst>
+              <a:ext uri="{FF2B5EF4-FFF2-40B4-BE49-F238E27FC236}">
+                <a16:creationId xmlns:a16="http://schemas.microsoft.com/office/drawing/2014/main" id="{E9391BF5-7344-DE6B-4B6C-85F2DCD907B5}"/>
+              </a:ext>
+            </a:extLst>
+          </p:cNvPr>
+          <p:cNvSpPr>
+            <a:spLocks noGrp="1"/>
+          </p:cNvSpPr>
+          <p:nvPr>
+            <p:ph type="title"/>
+          </p:nvPr>
+        </p:nvSpPr>
+        <p:spPr>
+          <a:xfrm>
+            <a:off x="568713" y="1441312"/>
+            <a:ext cx="7898780" cy="857250"/>
+          </a:xfrm>
+        </p:spPr>
+        <p:txBody>
+          <a:bodyPr/>
+          <a:lstStyle/>
+          <a:p>
+            <a:pPr>
+              <a:buSzPct val="100000"/>
+            </a:pPr>
+            <a:br>
+              <a:rPr lang="en-US" sz="2000" dirty="0"/>
+            </a:br>
+            <a:br>
+              <a:rPr lang="en-US" sz="1800" dirty="0"/>
+            </a:br>
+            <a:br>
+              <a:rPr lang="en-US" sz="1800" dirty="0"/>
+            </a:br>
+            <a:br>
+              <a:rPr lang="en-US" sz="1800" dirty="0"/>
+            </a:br>
+            <a:br>
+              <a:rPr lang="en-US" sz="1800" dirty="0"/>
+            </a:br>
+            <a:br>
+              <a:rPr lang="en-US" sz="1800" dirty="0"/>
+            </a:br>
+            <a:endParaRPr lang="en-US" sz="1800" dirty="0"/>
+          </a:p>
+        </p:txBody>
+      </p:sp>
+      <p:sp>
+        <p:nvSpPr>
+          <p:cNvPr id="2" name="Title 1">
+            <a:extLst>
+              <a:ext uri="{FF2B5EF4-FFF2-40B4-BE49-F238E27FC236}">
+                <a16:creationId xmlns:a16="http://schemas.microsoft.com/office/drawing/2014/main" id="{EC26A3EE-8E77-1EA6-41E0-D2E0AE170C9C}"/>
+              </a:ext>
+            </a:extLst>
+          </p:cNvPr>
+          <p:cNvSpPr txBox="1">
+            <a:spLocks/>
+          </p:cNvSpPr>
+          <p:nvPr/>
+        </p:nvSpPr>
+        <p:spPr>
+          <a:xfrm>
+            <a:off x="505521" y="591595"/>
+            <a:ext cx="7961972" cy="585207"/>
+          </a:xfrm>
+          <a:prstGeom prst="rect">
+            <a:avLst/>
+          </a:prstGeom>
+          <a:noFill/>
+          <a:ln>
+            <a:noFill/>
+          </a:ln>
+        </p:spPr>
+        <p:txBody>
+          <a:bodyPr spcFirstLastPara="1" wrap="square" lIns="0" tIns="0" rIns="0" bIns="0" anchor="t" anchorCtr="0">
+            <a:noAutofit/>
+          </a:bodyPr>
+          <a:lstStyle>
+            <a:defPPr marR="0" lvl="0" algn="l" rtl="0">
+              <a:lnSpc>
+                <a:spcPct val="100000"/>
+              </a:lnSpc>
+              <a:spcBef>
+                <a:spcPts val="0"/>
+              </a:spcBef>
+              <a:spcAft>
+                <a:spcPts val="0"/>
+              </a:spcAft>
+            </a:defPPr>
+            <a:lvl1pPr marR="0" lvl="0" algn="l" rtl="0">
+              <a:lnSpc>
+                <a:spcPct val="90000"/>
+              </a:lnSpc>
+              <a:spcBef>
+                <a:spcPts val="0"/>
+              </a:spcBef>
+              <a:spcAft>
+                <a:spcPts val="0"/>
+              </a:spcAft>
+              <a:buClr>
+                <a:schemeClr val="dk1"/>
+              </a:buClr>
+              <a:buSzPts val="2400"/>
+              <a:buFont typeface="Arial"/>
+              <a:buNone/>
+              <a:defRPr sz="2400" b="0" i="0" u="none" strike="noStrike" cap="none">
+                <a:solidFill>
+                  <a:schemeClr val="dk1"/>
+                </a:solidFill>
+                <a:latin typeface="Arial"/>
+                <a:ea typeface="Arial"/>
+                <a:cs typeface="Arial"/>
+                <a:sym typeface="Arial"/>
+              </a:defRPr>
+            </a:lvl1pPr>
+            <a:lvl2pPr marR="0" lvl="1" algn="l" rtl="0">
+              <a:lnSpc>
+                <a:spcPct val="100000"/>
+              </a:lnSpc>
+              <a:spcBef>
+                <a:spcPts val="0"/>
+              </a:spcBef>
+              <a:spcAft>
+                <a:spcPts val="0"/>
+              </a:spcAft>
+              <a:buClr>
+                <a:srgbClr val="000000"/>
+              </a:buClr>
+              <a:buSzPts val="1400"/>
+              <a:buFont typeface="Arial"/>
+              <a:buNone/>
+              <a:defRPr sz="1800" b="0" i="0" u="none" strike="noStrike" cap="none">
+                <a:solidFill>
+                  <a:srgbClr val="000000"/>
+                </a:solidFill>
+                <a:latin typeface="Arial"/>
+                <a:ea typeface="Arial"/>
+                <a:cs typeface="Arial"/>
+                <a:sym typeface="Arial"/>
+              </a:defRPr>
+            </a:lvl2pPr>
+            <a:lvl3pPr marR="0" lvl="2" algn="l" rtl="0">
+              <a:lnSpc>
+                <a:spcPct val="100000"/>
+              </a:lnSpc>
+              <a:spcBef>
+                <a:spcPts val="0"/>
+              </a:spcBef>
+              <a:spcAft>
+                <a:spcPts val="0"/>
+              </a:spcAft>
+              <a:buClr>
+                <a:srgbClr val="000000"/>
+              </a:buClr>
+              <a:buSzPts val="1400"/>
+              <a:buFont typeface="Arial"/>
+              <a:buNone/>
+              <a:defRPr sz="1800" b="0" i="0" u="none" strike="noStrike" cap="none">
+                <a:solidFill>
+                  <a:srgbClr val="000000"/>
+                </a:solidFill>
+                <a:latin typeface="Arial"/>
+                <a:ea typeface="Arial"/>
+                <a:cs typeface="Arial"/>
+                <a:sym typeface="Arial"/>
+              </a:defRPr>
+            </a:lvl3pPr>
+            <a:lvl4pPr marR="0" lvl="3" algn="l" rtl="0">
+              <a:lnSpc>
+                <a:spcPct val="100000"/>
+              </a:lnSpc>
+              <a:spcBef>
+                <a:spcPts val="0"/>
+              </a:spcBef>
+              <a:spcAft>
+                <a:spcPts val="0"/>
+              </a:spcAft>
+              <a:buClr>
+                <a:srgbClr val="000000"/>
+              </a:buClr>
+              <a:buSzPts val="1400"/>
+              <a:buFont typeface="Arial"/>
+              <a:buNone/>
+              <a:defRPr sz="1800" b="0" i="0" u="none" strike="noStrike" cap="none">
+                <a:solidFill>
+                  <a:srgbClr val="000000"/>
+                </a:solidFill>
+                <a:latin typeface="Arial"/>
+                <a:ea typeface="Arial"/>
+                <a:cs typeface="Arial"/>
+                <a:sym typeface="Arial"/>
+              </a:defRPr>
+            </a:lvl4pPr>
+            <a:lvl5pPr marR="0" lvl="4" algn="l" rtl="0">
+              <a:lnSpc>
+                <a:spcPct val="100000"/>
+              </a:lnSpc>
+              <a:spcBef>
+                <a:spcPts val="0"/>
+              </a:spcBef>
+              <a:spcAft>
+                <a:spcPts val="0"/>
+              </a:spcAft>
+              <a:buClr>
+                <a:srgbClr val="000000"/>
+              </a:buClr>
+              <a:buSzPts val="1400"/>
+              <a:buFont typeface="Arial"/>
+              <a:buNone/>
+              <a:defRPr sz="1800" b="0" i="0" u="none" strike="noStrike" cap="none">
+                <a:solidFill>
+                  <a:srgbClr val="000000"/>
+                </a:solidFill>
+                <a:latin typeface="Arial"/>
+                <a:ea typeface="Arial"/>
+                <a:cs typeface="Arial"/>
+                <a:sym typeface="Arial"/>
+              </a:defRPr>
+            </a:lvl5pPr>
+            <a:lvl6pPr marR="0" lvl="5" algn="l" rtl="0">
+              <a:lnSpc>
+                <a:spcPct val="100000"/>
+              </a:lnSpc>
+              <a:spcBef>
+                <a:spcPts val="0"/>
+              </a:spcBef>
+              <a:spcAft>
+                <a:spcPts val="0"/>
+              </a:spcAft>
+              <a:buClr>
+                <a:srgbClr val="000000"/>
+              </a:buClr>
+              <a:buSzPts val="1400"/>
+              <a:buFont typeface="Arial"/>
+              <a:buNone/>
+              <a:defRPr sz="1800" b="0" i="0" u="none" strike="noStrike" cap="none">
+                <a:solidFill>
+                  <a:srgbClr val="000000"/>
+                </a:solidFill>
+                <a:latin typeface="Arial"/>
+                <a:ea typeface="Arial"/>
+                <a:cs typeface="Arial"/>
+                <a:sym typeface="Arial"/>
+              </a:defRPr>
+            </a:lvl6pPr>
+            <a:lvl7pPr marR="0" lvl="6" algn="l" rtl="0">
+              <a:lnSpc>
+                <a:spcPct val="100000"/>
+              </a:lnSpc>
+              <a:spcBef>
+                <a:spcPts val="0"/>
+              </a:spcBef>
+              <a:spcAft>
+                <a:spcPts val="0"/>
+              </a:spcAft>
+              <a:buClr>
+                <a:srgbClr val="000000"/>
+              </a:buClr>
+              <a:buSzPts val="1400"/>
+              <a:buFont typeface="Arial"/>
+              <a:buNone/>
+              <a:defRPr sz="1800" b="0" i="0" u="none" strike="noStrike" cap="none">
+                <a:solidFill>
+                  <a:srgbClr val="000000"/>
+                </a:solidFill>
+                <a:latin typeface="Arial"/>
+                <a:ea typeface="Arial"/>
+                <a:cs typeface="Arial"/>
+                <a:sym typeface="Arial"/>
+              </a:defRPr>
+            </a:lvl7pPr>
+            <a:lvl8pPr marR="0" lvl="7" algn="l" rtl="0">
+              <a:lnSpc>
+                <a:spcPct val="100000"/>
+              </a:lnSpc>
+              <a:spcBef>
+                <a:spcPts val="0"/>
+              </a:spcBef>
+              <a:spcAft>
+                <a:spcPts val="0"/>
+              </a:spcAft>
+              <a:buClr>
+                <a:srgbClr val="000000"/>
+              </a:buClr>
+              <a:buSzPts val="1400"/>
+              <a:buFont typeface="Arial"/>
+              <a:buNone/>
+              <a:defRPr sz="1800" b="0" i="0" u="none" strike="noStrike" cap="none">
+                <a:solidFill>
+                  <a:srgbClr val="000000"/>
+                </a:solidFill>
+                <a:latin typeface="Arial"/>
+                <a:ea typeface="Arial"/>
+                <a:cs typeface="Arial"/>
+                <a:sym typeface="Arial"/>
+              </a:defRPr>
+            </a:lvl8pPr>
+            <a:lvl9pPr marR="0" lvl="8" algn="l" rtl="0">
+              <a:lnSpc>
+                <a:spcPct val="100000"/>
+              </a:lnSpc>
+              <a:spcBef>
+                <a:spcPts val="0"/>
+              </a:spcBef>
+              <a:spcAft>
+                <a:spcPts val="0"/>
+              </a:spcAft>
+              <a:buClr>
+                <a:srgbClr val="000000"/>
+              </a:buClr>
+              <a:buSzPts val="1400"/>
+              <a:buFont typeface="Arial"/>
+              <a:buNone/>
+              <a:defRPr sz="1800" b="0" i="0" u="none" strike="noStrike" cap="none">
+                <a:solidFill>
+                  <a:srgbClr val="000000"/>
+                </a:solidFill>
+                <a:latin typeface="Arial"/>
+                <a:ea typeface="Arial"/>
+                <a:cs typeface="Arial"/>
+                <a:sym typeface="Arial"/>
+              </a:defRPr>
+            </a:lvl9pPr>
+          </a:lstStyle>
+          <a:p>
+            <a:r>
+              <a:rPr lang="en-US" dirty="0"/>
+              <a:t>Functions with multiple returns</a:t>
+            </a:r>
+          </a:p>
+        </p:txBody>
+      </p:sp>
+      <p:sp>
+        <p:nvSpPr>
+          <p:cNvPr id="6" name="TextBox 5">
+            <a:extLst>
+              <a:ext uri="{FF2B5EF4-FFF2-40B4-BE49-F238E27FC236}">
+                <a16:creationId xmlns:a16="http://schemas.microsoft.com/office/drawing/2014/main" id="{15374111-005C-FC1A-2A60-5456BAA22EA6}"/>
+              </a:ext>
+            </a:extLst>
+          </p:cNvPr>
+          <p:cNvSpPr txBox="1"/>
+          <p:nvPr/>
+        </p:nvSpPr>
+        <p:spPr>
+          <a:xfrm>
+            <a:off x="505521" y="1347956"/>
+            <a:ext cx="6858000" cy="738664"/>
+          </a:xfrm>
+          <a:prstGeom prst="rect">
+            <a:avLst/>
+          </a:prstGeom>
+          <a:noFill/>
+        </p:spPr>
+        <p:txBody>
+          <a:bodyPr wrap="square">
+            <a:spAutoFit/>
+          </a:bodyPr>
+          <a:lstStyle/>
+          <a:p>
+            <a:pPr>
+              <a:buNone/>
+            </a:pPr>
+            <a:r>
+              <a:rPr lang="en-US" b="1" dirty="0"/>
+              <a:t>Functions can return more than one value</a:t>
+            </a:r>
+          </a:p>
+          <a:p>
+            <a:pPr>
+              <a:buNone/>
+            </a:pPr>
+            <a:r>
+              <a:rPr lang="en-US" dirty="0"/>
+              <a:t>A </a:t>
+            </a:r>
+            <a:r>
+              <a:rPr lang="en-US" dirty="0">
+                <a:latin typeface="Courier New" panose="02070309020205020404" pitchFamily="49" charset="0"/>
+              </a:rPr>
+              <a:t>return</a:t>
+            </a:r>
+            <a:r>
+              <a:rPr lang="en-US" dirty="0"/>
+              <a:t> statement can send back several values at once by separating them with commas:</a:t>
+            </a:r>
+          </a:p>
+        </p:txBody>
+      </p:sp>
+      <p:sp>
+        <p:nvSpPr>
+          <p:cNvPr id="8" name="TextBox 7">
+            <a:extLst>
+              <a:ext uri="{FF2B5EF4-FFF2-40B4-BE49-F238E27FC236}">
+                <a16:creationId xmlns:a16="http://schemas.microsoft.com/office/drawing/2014/main" id="{DD56BECC-D0AC-AA28-3527-BC591C641A20}"/>
+              </a:ext>
+            </a:extLst>
+          </p:cNvPr>
+          <p:cNvSpPr txBox="1"/>
+          <p:nvPr/>
+        </p:nvSpPr>
+        <p:spPr>
+          <a:xfrm>
+            <a:off x="505521" y="2298562"/>
+            <a:ext cx="5519854" cy="1169551"/>
+          </a:xfrm>
+          <a:prstGeom prst="rect">
+            <a:avLst/>
+          </a:prstGeom>
+          <a:noFill/>
+        </p:spPr>
+        <p:txBody>
+          <a:bodyPr wrap="square">
+            <a:spAutoFit/>
+          </a:bodyPr>
+          <a:lstStyle/>
+          <a:p>
+            <a:r>
+              <a:rPr lang="en-US" dirty="0"/>
+              <a:t>def </a:t>
+            </a:r>
+            <a:r>
+              <a:rPr lang="en-US" dirty="0" err="1"/>
+              <a:t>min_max</a:t>
+            </a:r>
+            <a:r>
+              <a:rPr lang="en-US" dirty="0"/>
+              <a:t>(numbers):</a:t>
+            </a:r>
+          </a:p>
+          <a:p>
+            <a:r>
+              <a:rPr lang="en-US" dirty="0"/>
+              <a:t>    return min(numbers), max(numbers)</a:t>
+            </a:r>
+          </a:p>
+          <a:p>
+            <a:endParaRPr lang="en-US" dirty="0"/>
+          </a:p>
+          <a:p>
+            <a:r>
+              <a:rPr lang="en-US" dirty="0"/>
+              <a:t>result = </a:t>
+            </a:r>
+            <a:r>
+              <a:rPr lang="en-US" dirty="0" err="1"/>
+              <a:t>min_max</a:t>
+            </a:r>
+            <a:r>
+              <a:rPr lang="en-US" dirty="0"/>
+              <a:t>([4, 9, 1, 7])</a:t>
+            </a:r>
+          </a:p>
+          <a:p>
+            <a:r>
+              <a:rPr lang="en-US" dirty="0"/>
+              <a:t>print(result)        # (1, 9)</a:t>
+            </a:r>
+          </a:p>
+        </p:txBody>
+      </p:sp>
+      <p:sp>
+        <p:nvSpPr>
+          <p:cNvPr id="10" name="TextBox 9">
+            <a:extLst>
+              <a:ext uri="{FF2B5EF4-FFF2-40B4-BE49-F238E27FC236}">
+                <a16:creationId xmlns:a16="http://schemas.microsoft.com/office/drawing/2014/main" id="{CF6B03D2-7C86-0F4C-FE21-F0AE31927DDC}"/>
+              </a:ext>
+            </a:extLst>
+          </p:cNvPr>
+          <p:cNvSpPr txBox="1"/>
+          <p:nvPr/>
+        </p:nvSpPr>
+        <p:spPr>
+          <a:xfrm>
+            <a:off x="505521" y="3680055"/>
+            <a:ext cx="7898780" cy="738664"/>
+          </a:xfrm>
+          <a:prstGeom prst="rect">
+            <a:avLst/>
+          </a:prstGeom>
+          <a:noFill/>
+        </p:spPr>
+        <p:txBody>
+          <a:bodyPr wrap="square">
+            <a:spAutoFit/>
+          </a:bodyPr>
+          <a:lstStyle/>
+          <a:p>
+            <a:r>
+              <a:rPr lang="en-US" dirty="0"/>
+              <a:t>Under the hood, Python isn't doing anything magical — it's packing those values into a </a:t>
+            </a:r>
+            <a:r>
+              <a:rPr lang="en-US" b="1" dirty="0"/>
+              <a:t>tuple</a:t>
+            </a:r>
+            <a:r>
+              <a:rPr lang="en-US" dirty="0"/>
+              <a:t>. That's why printing </a:t>
+            </a:r>
+            <a:r>
+              <a:rPr lang="en-US" dirty="0">
+                <a:latin typeface="Courier New" panose="02070309020205020404" pitchFamily="49" charset="0"/>
+              </a:rPr>
+              <a:t>result</a:t>
+            </a:r>
+            <a:r>
+              <a:rPr lang="en-US" dirty="0"/>
+              <a:t> shows </a:t>
+            </a:r>
+            <a:r>
+              <a:rPr lang="en-US" dirty="0">
+                <a:latin typeface="Courier New" panose="02070309020205020404" pitchFamily="49" charset="0"/>
+              </a:rPr>
+              <a:t>(1, 9)</a:t>
+            </a:r>
+            <a:r>
+              <a:rPr lang="en-US" dirty="0"/>
+              <a:t> with parentheses. Returning </a:t>
+            </a:r>
+            <a:r>
+              <a:rPr lang="en-US" dirty="0">
+                <a:latin typeface="Courier New" panose="02070309020205020404" pitchFamily="49" charset="0"/>
+              </a:rPr>
+              <a:t>min(numbers), max(numbers)</a:t>
+            </a:r>
+            <a:r>
+              <a:rPr lang="en-US" dirty="0"/>
+              <a:t> is really returning the single tuple </a:t>
+            </a:r>
+            <a:r>
+              <a:rPr lang="en-US" dirty="0">
+                <a:latin typeface="Courier New" panose="02070309020205020404" pitchFamily="49" charset="0"/>
+              </a:rPr>
+              <a:t>(1, 9)</a:t>
+            </a:r>
+            <a:r>
+              <a:rPr lang="en-US" dirty="0"/>
+              <a:t>.</a:t>
+            </a:r>
+          </a:p>
+        </p:txBody>
+      </p:sp>
+    </p:spTree>
+    <p:extLst>
+      <p:ext uri="{BB962C8B-B14F-4D97-AF65-F5344CB8AC3E}">
+        <p14:creationId xmlns:p14="http://schemas.microsoft.com/office/powerpoint/2010/main" val="924481098"/>
+      </p:ext>
+    </p:extLst>
+  </p:cSld>
+  <p:clrMapOvr>
+    <a:masterClrMapping/>
+  </p:clrMapOvr>
+  <p:timing>
+    <p:tnLst>
+      <p:par>
+        <p:cTn id="1" dur="indefinite" restart="never" nodeType="tmRoot">
+          <p:childTnLst>
+            <p:seq concurrent="1" nextAc="seek">
+              <p:cTn id="2" dur="indefinite" nodeType="mainSeq">
+                <p:childTnLst>
+                  <p:par>
+                    <p:cTn id="3" fill="hold">
+                      <p:stCondLst>
+                        <p:cond delay="indefinite"/>
+                      </p:stCondLst>
+                      <p:childTnLst>
+                        <p:par>
+                          <p:cTn id="4" fill="hold">
+                            <p:stCondLst>
+                              <p:cond delay="0"/>
+                            </p:stCondLst>
+                            <p:childTnLst>
+                              <p:par>
+                                <p:cTn id="5" presetID="1" presetClass="entr" presetSubtype="0" fill="hold" grpId="0" nodeType="clickEffect">
+                                  <p:stCondLst>
+                                    <p:cond delay="0"/>
+                                  </p:stCondLst>
+                                  <p:childTnLst>
+                                    <p:set>
+                                      <p:cBhvr>
+                                        <p:cTn id="6" dur="1" fill="hold">
+                                          <p:stCondLst>
+                                            <p:cond delay="0"/>
+                                          </p:stCondLst>
+                                        </p:cTn>
+                                        <p:tgtEl>
+                                          <p:spTgt spid="3"/>
+                                        </p:tgtEl>
+                                        <p:attrNameLst>
+                                          <p:attrName>style.visibility</p:attrName>
+                                        </p:attrNameLst>
+                                      </p:cBhvr>
+                                      <p:to>
+                                        <p:strVal val="visible"/>
+                                      </p:to>
+                                    </p:set>
+                                  </p:childTnLst>
+                                </p:cTn>
+                              </p:par>
+                            </p:childTnLst>
+                          </p:cTn>
+                        </p:par>
+                      </p:childTnLst>
+                    </p:cTn>
+                  </p:par>
+                  <p:par>
+                    <p:cTn id="7" fill="hold">
+                      <p:stCondLst>
+                        <p:cond delay="indefinite"/>
+                      </p:stCondLst>
+                      <p:childTnLst>
+                        <p:par>
+                          <p:cTn id="8" fill="hold">
+                            <p:stCondLst>
+                              <p:cond delay="0"/>
+                            </p:stCondLst>
+                            <p:childTnLst>
+                              <p:par>
+                                <p:cTn id="9" presetID="1" presetClass="entr" presetSubtype="0" fill="hold" grpId="0" nodeType="clickEffect">
+                                  <p:stCondLst>
+                                    <p:cond delay="0"/>
+                                  </p:stCondLst>
+                                  <p:childTnLst>
+                                    <p:set>
+                                      <p:cBhvr>
+                                        <p:cTn id="10" dur="1" fill="hold">
+                                          <p:stCondLst>
+                                            <p:cond delay="0"/>
+                                          </p:stCondLst>
+                                        </p:cTn>
+                                        <p:tgtEl>
+                                          <p:spTgt spid="8"/>
+                                        </p:tgtEl>
+                                        <p:attrNameLst>
+                                          <p:attrName>style.visibility</p:attrName>
+                                        </p:attrNameLst>
+                                      </p:cBhvr>
+                                      <p:to>
+                                        <p:strVal val="visible"/>
+                                      </p:to>
+                                    </p:set>
+                                  </p:childTnLst>
+                                </p:cTn>
+                              </p:par>
+                            </p:childTnLst>
+                          </p:cTn>
+                        </p:par>
+                      </p:childTnLst>
+                    </p:cTn>
+                  </p:par>
+                  <p:par>
+                    <p:cTn id="11" fill="hold">
+                      <p:stCondLst>
+                        <p:cond delay="indefinite"/>
+                      </p:stCondLst>
+                      <p:childTnLst>
+                        <p:par>
+                          <p:cTn id="12" fill="hold">
+                            <p:stCondLst>
+                              <p:cond delay="0"/>
+                            </p:stCondLst>
+                            <p:childTnLst>
+                              <p:par>
+                                <p:cTn id="13" presetID="1" presetClass="entr" presetSubtype="0" fill="hold" nodeType="clickEffect">
+                                  <p:stCondLst>
+                                    <p:cond delay="0"/>
+                                  </p:stCondLst>
+                                  <p:childTnLst>
+                                    <p:set>
+                                      <p:cBhvr>
+                                        <p:cTn id="14" dur="1" fill="hold">
+                                          <p:stCondLst>
+                                            <p:cond delay="0"/>
+                                          </p:stCondLst>
+                                        </p:cTn>
+                                        <p:tgtEl>
+                                          <p:spTgt spid="10">
+                                            <p:txEl>
+                                              <p:pRg st="0" end="0"/>
+                                            </p:txEl>
+                                          </p:spTgt>
+                                        </p:tgtEl>
+                                        <p:attrNameLst>
+                                          <p:attrName>style.visibility</p:attrName>
+                                        </p:attrNameLst>
+                                      </p:cBhvr>
+                                      <p:to>
+                                        <p:strVal val="visible"/>
+                                      </p:to>
+                                    </p:set>
+                                  </p:childTnLst>
+                                </p:cTn>
+                              </p:par>
+                            </p:childTnLst>
+                          </p:cTn>
+                        </p:par>
+                      </p:childTnLst>
+                    </p:cTn>
+                  </p:par>
+                </p:childTnLst>
+              </p:cTn>
+              <p:prevCondLst>
+                <p:cond evt="onPrev" delay="0">
+                  <p:tgtEl>
+                    <p:sldTgt/>
+                  </p:tgtEl>
+                </p:cond>
+              </p:prevCondLst>
+              <p:nextCondLst>
+                <p:cond evt="onNext" delay="0">
+                  <p:tgtEl>
+                    <p:sldTgt/>
+                  </p:tgtEl>
+                </p:cond>
+              </p:nextCondLst>
+            </p:seq>
+          </p:childTnLst>
+        </p:cTn>
+      </p:par>
+    </p:tnLst>
+    <p:bldLst>
+      <p:bldP spid="3" grpId="0"/>
+      <p:bldP spid="8" grpId="0"/>
+    </p:bldLst>
+  </p:timing>
+</p:sld>
+</file>
+
+<file path=ppt/slides/slide24.xml><?xml version="1.0" encoding="utf-8"?>
+<p:sld xmlns:a="http://schemas.openxmlformats.org/drawingml/2006/main" xmlns:r="http://schemas.openxmlformats.org/officeDocument/2006/relationships" xmlns:p="http://schemas.openxmlformats.org/presentationml/2006/main">
+  <p:cSld>
+    <p:spTree>
+      <p:nvGrpSpPr>
+        <p:cNvPr id="1" name="">
+          <a:extLst>
+            <a:ext uri="{FF2B5EF4-FFF2-40B4-BE49-F238E27FC236}">
+              <a16:creationId xmlns:a16="http://schemas.microsoft.com/office/drawing/2014/main" id="{FB70F3C8-F68D-E970-4E6E-AE2A64F23F4D}"/>
+            </a:ext>
+          </a:extLst>
+        </p:cNvPr>
+        <p:cNvGrpSpPr/>
+        <p:nvPr/>
+      </p:nvGrpSpPr>
+      <p:grpSpPr>
+        <a:xfrm>
+          <a:off x="0" y="0"/>
+          <a:ext cx="0" cy="0"/>
+          <a:chOff x="0" y="0"/>
+          <a:chExt cx="0" cy="0"/>
+        </a:xfrm>
+      </p:grpSpPr>
+      <p:sp>
+        <p:nvSpPr>
+          <p:cNvPr id="4" name="Slide Number Placeholder 3">
+            <a:extLst>
+              <a:ext uri="{FF2B5EF4-FFF2-40B4-BE49-F238E27FC236}">
+                <a16:creationId xmlns:a16="http://schemas.microsoft.com/office/drawing/2014/main" id="{D4F83A9B-DB13-6C1A-5FC2-2186F2F007BB}"/>
+              </a:ext>
+            </a:extLst>
+          </p:cNvPr>
+          <p:cNvSpPr>
+            <a:spLocks noGrp="1"/>
+          </p:cNvSpPr>
+          <p:nvPr>
+            <p:ph type="sldNum" sz="quarter" idx="4"/>
+          </p:nvPr>
+        </p:nvSpPr>
+        <p:spPr/>
+        <p:txBody>
+          <a:bodyPr/>
+          <a:lstStyle/>
+          <a:p>
+            <a:fld id="{71B8893A-F325-44A6-8EFB-883C20332CFE}" type="slidenum">
+              <a:rPr lang="en-US" smtClean="0"/>
+              <a:pPr/>
+              <a:t>24</a:t>
+            </a:fld>
+            <a:endParaRPr lang="en-US"/>
+          </a:p>
+        </p:txBody>
+      </p:sp>
+      <p:sp>
+        <p:nvSpPr>
+          <p:cNvPr id="3" name="Title 2">
+            <a:extLst>
+              <a:ext uri="{FF2B5EF4-FFF2-40B4-BE49-F238E27FC236}">
+                <a16:creationId xmlns:a16="http://schemas.microsoft.com/office/drawing/2014/main" id="{2D45C5EF-67E2-B5F3-0AF1-4DADA900CA9A}"/>
+              </a:ext>
+            </a:extLst>
+          </p:cNvPr>
+          <p:cNvSpPr>
+            <a:spLocks noGrp="1"/>
+          </p:cNvSpPr>
+          <p:nvPr>
+            <p:ph type="title"/>
+          </p:nvPr>
+        </p:nvSpPr>
+        <p:spPr>
+          <a:xfrm>
+            <a:off x="568713" y="1441312"/>
+            <a:ext cx="7898780" cy="857250"/>
+          </a:xfrm>
+        </p:spPr>
+        <p:txBody>
+          <a:bodyPr/>
+          <a:lstStyle/>
+          <a:p>
+            <a:pPr>
+              <a:buSzPct val="100000"/>
+            </a:pPr>
+            <a:br>
+              <a:rPr lang="en-US" sz="2000" dirty="0"/>
+            </a:br>
+            <a:br>
+              <a:rPr lang="en-US" sz="1800" dirty="0"/>
+            </a:br>
+            <a:br>
+              <a:rPr lang="en-US" sz="1800" dirty="0"/>
+            </a:br>
+            <a:br>
+              <a:rPr lang="en-US" sz="1800" dirty="0"/>
+            </a:br>
+            <a:br>
+              <a:rPr lang="en-US" sz="1800" dirty="0"/>
+            </a:br>
+            <a:br>
+              <a:rPr lang="en-US" sz="1800" dirty="0"/>
+            </a:br>
+            <a:endParaRPr lang="en-US" sz="1800" dirty="0"/>
+          </a:p>
+        </p:txBody>
+      </p:sp>
+      <p:sp>
+        <p:nvSpPr>
+          <p:cNvPr id="2" name="Title 1">
+            <a:extLst>
+              <a:ext uri="{FF2B5EF4-FFF2-40B4-BE49-F238E27FC236}">
+                <a16:creationId xmlns:a16="http://schemas.microsoft.com/office/drawing/2014/main" id="{FD172D5D-F912-A79D-5BB6-B1E9552FB79B}"/>
+              </a:ext>
+            </a:extLst>
+          </p:cNvPr>
+          <p:cNvSpPr txBox="1">
+            <a:spLocks/>
+          </p:cNvSpPr>
+          <p:nvPr/>
+        </p:nvSpPr>
+        <p:spPr>
+          <a:xfrm>
+            <a:off x="505521" y="591595"/>
+            <a:ext cx="7961972" cy="585207"/>
+          </a:xfrm>
+          <a:prstGeom prst="rect">
+            <a:avLst/>
+          </a:prstGeom>
+          <a:noFill/>
+          <a:ln>
+            <a:noFill/>
+          </a:ln>
+        </p:spPr>
+        <p:txBody>
+          <a:bodyPr spcFirstLastPara="1" wrap="square" lIns="0" tIns="0" rIns="0" bIns="0" anchor="t" anchorCtr="0">
+            <a:noAutofit/>
+          </a:bodyPr>
+          <a:lstStyle>
+            <a:defPPr marR="0" lvl="0" algn="l" rtl="0">
+              <a:lnSpc>
+                <a:spcPct val="100000"/>
+              </a:lnSpc>
+              <a:spcBef>
+                <a:spcPts val="0"/>
+              </a:spcBef>
+              <a:spcAft>
+                <a:spcPts val="0"/>
+              </a:spcAft>
+            </a:defPPr>
+            <a:lvl1pPr marR="0" lvl="0" algn="l" rtl="0">
+              <a:lnSpc>
+                <a:spcPct val="90000"/>
+              </a:lnSpc>
+              <a:spcBef>
+                <a:spcPts val="0"/>
+              </a:spcBef>
+              <a:spcAft>
+                <a:spcPts val="0"/>
+              </a:spcAft>
+              <a:buClr>
+                <a:schemeClr val="dk1"/>
+              </a:buClr>
+              <a:buSzPts val="2400"/>
+              <a:buFont typeface="Arial"/>
+              <a:buNone/>
+              <a:defRPr sz="2400" b="0" i="0" u="none" strike="noStrike" cap="none">
+                <a:solidFill>
+                  <a:schemeClr val="dk1"/>
+                </a:solidFill>
+                <a:latin typeface="Arial"/>
+                <a:ea typeface="Arial"/>
+                <a:cs typeface="Arial"/>
+                <a:sym typeface="Arial"/>
+              </a:defRPr>
+            </a:lvl1pPr>
+            <a:lvl2pPr marR="0" lvl="1" algn="l" rtl="0">
+              <a:lnSpc>
+                <a:spcPct val="100000"/>
+              </a:lnSpc>
+              <a:spcBef>
+                <a:spcPts val="0"/>
+              </a:spcBef>
+              <a:spcAft>
+                <a:spcPts val="0"/>
+              </a:spcAft>
+              <a:buClr>
+                <a:srgbClr val="000000"/>
+              </a:buClr>
+              <a:buSzPts val="1400"/>
+              <a:buFont typeface="Arial"/>
+              <a:buNone/>
+              <a:defRPr sz="1800" b="0" i="0" u="none" strike="noStrike" cap="none">
+                <a:solidFill>
+                  <a:srgbClr val="000000"/>
+                </a:solidFill>
+                <a:latin typeface="Arial"/>
+                <a:ea typeface="Arial"/>
+                <a:cs typeface="Arial"/>
+                <a:sym typeface="Arial"/>
+              </a:defRPr>
+            </a:lvl2pPr>
+            <a:lvl3pPr marR="0" lvl="2" algn="l" rtl="0">
+              <a:lnSpc>
+                <a:spcPct val="100000"/>
+              </a:lnSpc>
+              <a:spcBef>
+                <a:spcPts val="0"/>
+              </a:spcBef>
+              <a:spcAft>
+                <a:spcPts val="0"/>
+              </a:spcAft>
+              <a:buClr>
+                <a:srgbClr val="000000"/>
+              </a:buClr>
+              <a:buSzPts val="1400"/>
+              <a:buFont typeface="Arial"/>
+              <a:buNone/>
+              <a:defRPr sz="1800" b="0" i="0" u="none" strike="noStrike" cap="none">
+                <a:solidFill>
+                  <a:srgbClr val="000000"/>
+                </a:solidFill>
+                <a:latin typeface="Arial"/>
+                <a:ea typeface="Arial"/>
+                <a:cs typeface="Arial"/>
+                <a:sym typeface="Arial"/>
+              </a:defRPr>
+            </a:lvl3pPr>
+            <a:lvl4pPr marR="0" lvl="3" algn="l" rtl="0">
+              <a:lnSpc>
+                <a:spcPct val="100000"/>
+              </a:lnSpc>
+              <a:spcBef>
+                <a:spcPts val="0"/>
+              </a:spcBef>
+              <a:spcAft>
+                <a:spcPts val="0"/>
+              </a:spcAft>
+              <a:buClr>
+                <a:srgbClr val="000000"/>
+              </a:buClr>
+              <a:buSzPts val="1400"/>
+              <a:buFont typeface="Arial"/>
+              <a:buNone/>
+              <a:defRPr sz="1800" b="0" i="0" u="none" strike="noStrike" cap="none">
+                <a:solidFill>
+                  <a:srgbClr val="000000"/>
+                </a:solidFill>
+                <a:latin typeface="Arial"/>
+                <a:ea typeface="Arial"/>
+                <a:cs typeface="Arial"/>
+                <a:sym typeface="Arial"/>
+              </a:defRPr>
+            </a:lvl4pPr>
+            <a:lvl5pPr marR="0" lvl="4" algn="l" rtl="0">
+              <a:lnSpc>
+                <a:spcPct val="100000"/>
+              </a:lnSpc>
+              <a:spcBef>
+                <a:spcPts val="0"/>
+              </a:spcBef>
+              <a:spcAft>
+                <a:spcPts val="0"/>
+              </a:spcAft>
+              <a:buClr>
+                <a:srgbClr val="000000"/>
+              </a:buClr>
+              <a:buSzPts val="1400"/>
+              <a:buFont typeface="Arial"/>
+              <a:buNone/>
+              <a:defRPr sz="1800" b="0" i="0" u="none" strike="noStrike" cap="none">
+                <a:solidFill>
+                  <a:srgbClr val="000000"/>
+                </a:solidFill>
+                <a:latin typeface="Arial"/>
+                <a:ea typeface="Arial"/>
+                <a:cs typeface="Arial"/>
+                <a:sym typeface="Arial"/>
+              </a:defRPr>
+            </a:lvl5pPr>
+            <a:lvl6pPr marR="0" lvl="5" algn="l" rtl="0">
+              <a:lnSpc>
+                <a:spcPct val="100000"/>
+              </a:lnSpc>
+              <a:spcBef>
+                <a:spcPts val="0"/>
+              </a:spcBef>
+              <a:spcAft>
+                <a:spcPts val="0"/>
+              </a:spcAft>
+              <a:buClr>
+                <a:srgbClr val="000000"/>
+              </a:buClr>
+              <a:buSzPts val="1400"/>
+              <a:buFont typeface="Arial"/>
+              <a:buNone/>
+              <a:defRPr sz="1800" b="0" i="0" u="none" strike="noStrike" cap="none">
+                <a:solidFill>
+                  <a:srgbClr val="000000"/>
+                </a:solidFill>
+                <a:latin typeface="Arial"/>
+                <a:ea typeface="Arial"/>
+                <a:cs typeface="Arial"/>
+                <a:sym typeface="Arial"/>
+              </a:defRPr>
+            </a:lvl6pPr>
+            <a:lvl7pPr marR="0" lvl="6" algn="l" rtl="0">
+              <a:lnSpc>
+                <a:spcPct val="100000"/>
+              </a:lnSpc>
+              <a:spcBef>
+                <a:spcPts val="0"/>
+              </a:spcBef>
+              <a:spcAft>
+                <a:spcPts val="0"/>
+              </a:spcAft>
+              <a:buClr>
+                <a:srgbClr val="000000"/>
+              </a:buClr>
+              <a:buSzPts val="1400"/>
+              <a:buFont typeface="Arial"/>
+              <a:buNone/>
+              <a:defRPr sz="1800" b="0" i="0" u="none" strike="noStrike" cap="none">
+                <a:solidFill>
+                  <a:srgbClr val="000000"/>
+                </a:solidFill>
+                <a:latin typeface="Arial"/>
+                <a:ea typeface="Arial"/>
+                <a:cs typeface="Arial"/>
+                <a:sym typeface="Arial"/>
+              </a:defRPr>
+            </a:lvl7pPr>
+            <a:lvl8pPr marR="0" lvl="7" algn="l" rtl="0">
+              <a:lnSpc>
+                <a:spcPct val="100000"/>
+              </a:lnSpc>
+              <a:spcBef>
+                <a:spcPts val="0"/>
+              </a:spcBef>
+              <a:spcAft>
+                <a:spcPts val="0"/>
+              </a:spcAft>
+              <a:buClr>
+                <a:srgbClr val="000000"/>
+              </a:buClr>
+              <a:buSzPts val="1400"/>
+              <a:buFont typeface="Arial"/>
+              <a:buNone/>
+              <a:defRPr sz="1800" b="0" i="0" u="none" strike="noStrike" cap="none">
+                <a:solidFill>
+                  <a:srgbClr val="000000"/>
+                </a:solidFill>
+                <a:latin typeface="Arial"/>
+                <a:ea typeface="Arial"/>
+                <a:cs typeface="Arial"/>
+                <a:sym typeface="Arial"/>
+              </a:defRPr>
+            </a:lvl8pPr>
+            <a:lvl9pPr marR="0" lvl="8" algn="l" rtl="0">
+              <a:lnSpc>
+                <a:spcPct val="100000"/>
+              </a:lnSpc>
+              <a:spcBef>
+                <a:spcPts val="0"/>
+              </a:spcBef>
+              <a:spcAft>
+                <a:spcPts val="0"/>
+              </a:spcAft>
+              <a:buClr>
+                <a:srgbClr val="000000"/>
+              </a:buClr>
+              <a:buSzPts val="1400"/>
+              <a:buFont typeface="Arial"/>
+              <a:buNone/>
+              <a:defRPr sz="1800" b="0" i="0" u="none" strike="noStrike" cap="none">
+                <a:solidFill>
+                  <a:srgbClr val="000000"/>
+                </a:solidFill>
+                <a:latin typeface="Arial"/>
+                <a:ea typeface="Arial"/>
+                <a:cs typeface="Arial"/>
+                <a:sym typeface="Arial"/>
+              </a:defRPr>
+            </a:lvl9pPr>
+          </a:lstStyle>
+          <a:p>
+            <a:r>
+              <a:rPr lang="en-US" dirty="0"/>
+              <a:t>Functions with multiple returns</a:t>
+            </a:r>
+          </a:p>
+        </p:txBody>
+      </p:sp>
+      <p:sp>
+        <p:nvSpPr>
+          <p:cNvPr id="6" name="TextBox 5">
+            <a:extLst>
+              <a:ext uri="{FF2B5EF4-FFF2-40B4-BE49-F238E27FC236}">
+                <a16:creationId xmlns:a16="http://schemas.microsoft.com/office/drawing/2014/main" id="{6537E9BC-8290-DFCB-E8B8-DC661B36B456}"/>
+              </a:ext>
+            </a:extLst>
+          </p:cNvPr>
+          <p:cNvSpPr txBox="1"/>
+          <p:nvPr/>
+        </p:nvSpPr>
+        <p:spPr>
+          <a:xfrm>
+            <a:off x="505521" y="1347956"/>
+            <a:ext cx="6858000" cy="523220"/>
+          </a:xfrm>
+          <a:prstGeom prst="rect">
+            <a:avLst/>
+          </a:prstGeom>
+          <a:noFill/>
+        </p:spPr>
+        <p:txBody>
+          <a:bodyPr wrap="square">
+            <a:spAutoFit/>
+          </a:bodyPr>
+          <a:lstStyle/>
+          <a:p>
+            <a:r>
+              <a:rPr lang="en-US" b="1" dirty="0"/>
+              <a:t>Unpacking</a:t>
+            </a:r>
+            <a:r>
+              <a:rPr lang="en-US" dirty="0"/>
+              <a:t> is the reverse operation: taking a tuple (or any </a:t>
+            </a:r>
+            <a:r>
+              <a:rPr lang="en-US" dirty="0" err="1"/>
+              <a:t>iterable</a:t>
+            </a:r>
+            <a:r>
+              <a:rPr lang="en-US" dirty="0"/>
+              <a:t>) and splitting its contents into individual variables in one line</a:t>
+            </a:r>
+          </a:p>
+        </p:txBody>
+      </p:sp>
+      <p:sp>
+        <p:nvSpPr>
+          <p:cNvPr id="8" name="TextBox 7">
+            <a:extLst>
+              <a:ext uri="{FF2B5EF4-FFF2-40B4-BE49-F238E27FC236}">
+                <a16:creationId xmlns:a16="http://schemas.microsoft.com/office/drawing/2014/main" id="{4237F6F7-4A16-C473-3455-49DE9B2F8614}"/>
+              </a:ext>
+            </a:extLst>
+          </p:cNvPr>
+          <p:cNvSpPr txBox="1"/>
+          <p:nvPr/>
+        </p:nvSpPr>
+        <p:spPr>
+          <a:xfrm>
+            <a:off x="505521" y="2298562"/>
+            <a:ext cx="5519854" cy="954107"/>
+          </a:xfrm>
+          <a:prstGeom prst="rect">
+            <a:avLst/>
+          </a:prstGeom>
+          <a:noFill/>
+        </p:spPr>
+        <p:txBody>
+          <a:bodyPr wrap="square">
+            <a:spAutoFit/>
+          </a:bodyPr>
+          <a:lstStyle/>
+          <a:p>
+            <a:r>
+              <a:rPr lang="en-US" dirty="0"/>
+              <a:t>low, high = </a:t>
+            </a:r>
+            <a:r>
+              <a:rPr lang="en-US" dirty="0" err="1"/>
+              <a:t>min_max</a:t>
+            </a:r>
+            <a:r>
+              <a:rPr lang="en-US" dirty="0"/>
+              <a:t>([4, 9, 1, 7]) </a:t>
+            </a:r>
+          </a:p>
+          <a:p>
+            <a:endParaRPr lang="en-US" dirty="0"/>
+          </a:p>
+          <a:p>
+            <a:r>
+              <a:rPr lang="en-US" dirty="0"/>
+              <a:t>print(low) # 1 </a:t>
+            </a:r>
+          </a:p>
+          <a:p>
+            <a:r>
+              <a:rPr lang="en-US" dirty="0"/>
+              <a:t>print(high) # 9</a:t>
+            </a:r>
+          </a:p>
+        </p:txBody>
+      </p:sp>
+    </p:spTree>
+    <p:extLst>
+      <p:ext uri="{BB962C8B-B14F-4D97-AF65-F5344CB8AC3E}">
+        <p14:creationId xmlns:p14="http://schemas.microsoft.com/office/powerpoint/2010/main" val="317306403"/>
+      </p:ext>
+    </p:extLst>
+  </p:cSld>
+  <p:clrMapOvr>
+    <a:masterClrMapping/>
+  </p:clrMapOvr>
+  <p:timing>
+    <p:tnLst>
+      <p:par>
+        <p:cTn id="1" dur="indefinite" restart="never" nodeType="tmRoot">
+          <p:childTnLst>
+            <p:seq concurrent="1" nextAc="seek">
+              <p:cTn id="2" dur="indefinite" nodeType="mainSeq">
+                <p:childTnLst>
+                  <p:par>
+                    <p:cTn id="3" fill="hold">
+                      <p:stCondLst>
+                        <p:cond delay="indefinite"/>
+                      </p:stCondLst>
+                      <p:childTnLst>
+                        <p:par>
+                          <p:cTn id="4" fill="hold">
+                            <p:stCondLst>
+                              <p:cond delay="0"/>
+                            </p:stCondLst>
+                            <p:childTnLst>
+                              <p:par>
+                                <p:cTn id="5" presetID="1" presetClass="entr" presetSubtype="0" fill="hold" grpId="0" nodeType="clickEffect">
+                                  <p:stCondLst>
+                                    <p:cond delay="0"/>
+                                  </p:stCondLst>
+                                  <p:childTnLst>
+                                    <p:set>
+                                      <p:cBhvr>
+                                        <p:cTn id="6" dur="1" fill="hold">
+                                          <p:stCondLst>
+                                            <p:cond delay="0"/>
+                                          </p:stCondLst>
+                                        </p:cTn>
+                                        <p:tgtEl>
+                                          <p:spTgt spid="3"/>
+                                        </p:tgtEl>
+                                        <p:attrNameLst>
+                                          <p:attrName>style.visibility</p:attrName>
+                                        </p:attrNameLst>
+                                      </p:cBhvr>
+                                      <p:to>
+                                        <p:strVal val="visible"/>
+                                      </p:to>
+                                    </p:set>
+                                  </p:childTnLst>
+                                </p:cTn>
+                              </p:par>
+                            </p:childTnLst>
+                          </p:cTn>
+                        </p:par>
+                      </p:childTnLst>
+                    </p:cTn>
+                  </p:par>
+                  <p:par>
+                    <p:cTn id="7" fill="hold">
+                      <p:stCondLst>
+                        <p:cond delay="indefinite"/>
+                      </p:stCondLst>
+                      <p:childTnLst>
+                        <p:par>
+                          <p:cTn id="8" fill="hold">
+                            <p:stCondLst>
+                              <p:cond delay="0"/>
+                            </p:stCondLst>
+                            <p:childTnLst>
+                              <p:par>
+                                <p:cTn id="9" presetID="1" presetClass="entr" presetSubtype="0" fill="hold" grpId="0" nodeType="clickEffect">
+                                  <p:stCondLst>
+                                    <p:cond delay="0"/>
+                                  </p:stCondLst>
+                                  <p:childTnLst>
+                                    <p:set>
+                                      <p:cBhvr>
+                                        <p:cTn id="10" dur="1" fill="hold">
+                                          <p:stCondLst>
+                                            <p:cond delay="0"/>
+                                          </p:stCondLst>
+                                        </p:cTn>
+                                        <p:tgtEl>
+                                          <p:spTgt spid="8"/>
+                                        </p:tgtEl>
+                                        <p:attrNameLst>
+                                          <p:attrName>style.visibility</p:attrName>
+                                        </p:attrNameLst>
+                                      </p:cBhvr>
+                                      <p:to>
+                                        <p:strVal val="visible"/>
+                                      </p:to>
+                                    </p:set>
+                                  </p:childTnLst>
+                                </p:cTn>
+                              </p:par>
+                            </p:childTnLst>
+                          </p:cTn>
+                        </p:par>
+                      </p:childTnLst>
+                    </p:cTn>
+                  </p:par>
+                </p:childTnLst>
+              </p:cTn>
+              <p:prevCondLst>
+                <p:cond evt="onPrev" delay="0">
+                  <p:tgtEl>
+                    <p:sldTgt/>
+                  </p:tgtEl>
+                </p:cond>
+              </p:prevCondLst>
+              <p:nextCondLst>
+                <p:cond evt="onNext" delay="0">
+                  <p:tgtEl>
+                    <p:sldTgt/>
+                  </p:tgtEl>
+                </p:cond>
+              </p:nextCondLst>
+            </p:seq>
+          </p:childTnLst>
+        </p:cTn>
+      </p:par>
+    </p:tnLst>
+    <p:bldLst>
+      <p:bldP spid="3" grpId="0"/>
+      <p:bldP spid="8" grpId="0"/>
+    </p:bldLst>
+  </p:timing>
+</p:sld>
+</file>
+
+<file path=ppt/slides/slide25.xml><?xml version="1.0" encoding="utf-8"?>
+<p:sld xmlns:a="http://schemas.openxmlformats.org/drawingml/2006/main" xmlns:r="http://schemas.openxmlformats.org/officeDocument/2006/relationships" xmlns:p="http://schemas.openxmlformats.org/presentationml/2006/main">
+  <p:cSld>
+    <p:spTree>
+      <p:nvGrpSpPr>
+        <p:cNvPr id="1" name="">
+          <a:extLst>
+            <a:ext uri="{FF2B5EF4-FFF2-40B4-BE49-F238E27FC236}">
+              <a16:creationId xmlns:a16="http://schemas.microsoft.com/office/drawing/2014/main" id="{64DB0EA6-C017-E434-FF82-15E11A3D0B41}"/>
+            </a:ext>
+          </a:extLst>
+        </p:cNvPr>
+        <p:cNvGrpSpPr/>
+        <p:nvPr/>
+      </p:nvGrpSpPr>
+      <p:grpSpPr>
+        <a:xfrm>
+          <a:off x="0" y="0"/>
+          <a:ext cx="0" cy="0"/>
+          <a:chOff x="0" y="0"/>
+          <a:chExt cx="0" cy="0"/>
+        </a:xfrm>
+      </p:grpSpPr>
+      <p:sp>
+        <p:nvSpPr>
+          <p:cNvPr id="4" name="Slide Number Placeholder 3">
+            <a:extLst>
+              <a:ext uri="{FF2B5EF4-FFF2-40B4-BE49-F238E27FC236}">
+                <a16:creationId xmlns:a16="http://schemas.microsoft.com/office/drawing/2014/main" id="{83090092-129E-C4C9-455D-DD28807246B1}"/>
+              </a:ext>
+            </a:extLst>
+          </p:cNvPr>
+          <p:cNvSpPr>
+            <a:spLocks noGrp="1"/>
+          </p:cNvSpPr>
+          <p:nvPr>
+            <p:ph type="sldNum" sz="quarter" idx="4"/>
+          </p:nvPr>
+        </p:nvSpPr>
+        <p:spPr/>
+        <p:txBody>
+          <a:bodyPr/>
+          <a:lstStyle/>
+          <a:p>
+            <a:fld id="{71B8893A-F325-44A6-8EFB-883C20332CFE}" type="slidenum">
+              <a:rPr lang="en-US" smtClean="0"/>
+              <a:pPr/>
+              <a:t>25</a:t>
+            </a:fld>
+            <a:endParaRPr lang="en-US"/>
+          </a:p>
+        </p:txBody>
+      </p:sp>
+      <p:sp>
+        <p:nvSpPr>
+          <p:cNvPr id="3" name="Title 2">
+            <a:extLst>
+              <a:ext uri="{FF2B5EF4-FFF2-40B4-BE49-F238E27FC236}">
+                <a16:creationId xmlns:a16="http://schemas.microsoft.com/office/drawing/2014/main" id="{187C579E-D6EF-C2D5-B1CB-16B1D70590FA}"/>
+              </a:ext>
+            </a:extLst>
+          </p:cNvPr>
+          <p:cNvSpPr>
+            <a:spLocks noGrp="1"/>
+          </p:cNvSpPr>
+          <p:nvPr>
+            <p:ph type="title"/>
+          </p:nvPr>
+        </p:nvSpPr>
+        <p:spPr>
+          <a:xfrm>
+            <a:off x="591014" y="1248024"/>
+            <a:ext cx="7961971" cy="857250"/>
+          </a:xfrm>
+        </p:spPr>
+        <p:txBody>
+          <a:bodyPr/>
+          <a:lstStyle/>
+          <a:p>
+            <a:r>
+              <a:rPr lang="en-US" sz="1600" i="1" dirty="0"/>
+              <a:t>Requires: enumerate() — nothing else fancy</a:t>
+            </a:r>
+            <a:br>
+              <a:rPr lang="en-US" sz="1600" dirty="0"/>
+            </a:br>
+            <a:r>
+              <a:rPr lang="en-US" sz="1600" dirty="0"/>
+              <a:t>An airline boards passengers in the order they appear in the list. Seat numbers start at </a:t>
+            </a:r>
+            <a:r>
+              <a:rPr lang="en-US" sz="1600" b="1" dirty="0"/>
+              <a:t>1</a:t>
+            </a:r>
+            <a:r>
+              <a:rPr lang="en-US" sz="1600" dirty="0"/>
+              <a:t>, not 0.</a:t>
+            </a:r>
+            <a:br>
+              <a:rPr lang="en-US" sz="1600" dirty="0"/>
+            </a:br>
+            <a:br>
+              <a:rPr lang="en-US" sz="1600" dirty="0"/>
+            </a:br>
+            <a:br>
+              <a:rPr lang="en-US" sz="1600" dirty="0"/>
+            </a:br>
+            <a:r>
+              <a:rPr lang="en-US" sz="1600" dirty="0"/>
+              <a:t>passengers = ["Lopez", "Chen", "Okafor", "Smith", "Patel"]</a:t>
+            </a:r>
+            <a:br>
+              <a:rPr lang="en-US" sz="1600" dirty="0"/>
+            </a:br>
+            <a:br>
+              <a:rPr lang="en-US" sz="1600" dirty="0"/>
+            </a:br>
+            <a:br>
+              <a:rPr lang="en-US" sz="1600" dirty="0"/>
+            </a:br>
+            <a:r>
+              <a:rPr lang="en-US" sz="1600" dirty="0"/>
+              <a:t>Write a function </a:t>
+            </a:r>
+            <a:r>
+              <a:rPr lang="en-US" sz="1600" dirty="0" err="1"/>
+              <a:t>print_boarding_list</a:t>
+            </a:r>
+            <a:r>
+              <a:rPr lang="en-US" sz="1600" dirty="0"/>
+              <a:t>(passengers) that prints each passenger with their seat number:</a:t>
+            </a:r>
+            <a:br>
+              <a:rPr lang="en-US" sz="1600" dirty="0"/>
+            </a:br>
+            <a:r>
+              <a:rPr lang="en-US" sz="1600" dirty="0"/>
+              <a:t>Seat 1: Lopez</a:t>
+            </a:r>
+            <a:br>
+              <a:rPr lang="en-US" sz="1600" dirty="0"/>
+            </a:br>
+            <a:r>
+              <a:rPr lang="en-US" sz="1600" dirty="0"/>
+              <a:t>Seat 2: Chen</a:t>
+            </a:r>
+            <a:br>
+              <a:rPr lang="en-US" sz="1600" dirty="0"/>
+            </a:br>
+            <a:r>
+              <a:rPr lang="en-US" sz="1600" dirty="0"/>
+              <a:t>Seat 3: Okafor</a:t>
+            </a:r>
+            <a:br>
+              <a:rPr lang="en-US" sz="1600" dirty="0"/>
+            </a:br>
+            <a:r>
+              <a:rPr lang="en-US" sz="1600" dirty="0"/>
+              <a:t>Seat 4: Smith</a:t>
+            </a:r>
+            <a:br>
+              <a:rPr lang="en-US" sz="1600" dirty="0"/>
+            </a:br>
+            <a:r>
+              <a:rPr lang="en-US" sz="1600" dirty="0"/>
+              <a:t>Seat 5: Patel</a:t>
+            </a:r>
+            <a:br>
+              <a:rPr lang="en-US" sz="1600" dirty="0"/>
+            </a:br>
+            <a:br>
+              <a:rPr lang="en-US" sz="1600" dirty="0"/>
+            </a:br>
+            <a:r>
+              <a:rPr lang="en-US" sz="1600" dirty="0"/>
+              <a:t>You must use the enumerate() function!</a:t>
+            </a:r>
+            <a:br>
+              <a:rPr lang="en-US" sz="1600" dirty="0"/>
+            </a:br>
+            <a:br>
+              <a:rPr lang="en-US" sz="1400" dirty="0"/>
+            </a:br>
+            <a:br>
+              <a:rPr lang="en-US" sz="1400" dirty="0"/>
+            </a:br>
+            <a:endParaRPr lang="en-US" sz="1400" dirty="0"/>
+          </a:p>
+        </p:txBody>
+      </p:sp>
+      <p:sp>
+        <p:nvSpPr>
+          <p:cNvPr id="2" name="Title 1">
+            <a:extLst>
+              <a:ext uri="{FF2B5EF4-FFF2-40B4-BE49-F238E27FC236}">
+                <a16:creationId xmlns:a16="http://schemas.microsoft.com/office/drawing/2014/main" id="{453F5417-6274-FE94-5113-454D97FCCE5A}"/>
+              </a:ext>
+            </a:extLst>
+          </p:cNvPr>
+          <p:cNvSpPr txBox="1">
+            <a:spLocks/>
+          </p:cNvSpPr>
+          <p:nvPr/>
+        </p:nvSpPr>
+        <p:spPr>
+          <a:xfrm>
+            <a:off x="505521" y="591595"/>
+            <a:ext cx="7961972" cy="585207"/>
+          </a:xfrm>
+          <a:prstGeom prst="rect">
+            <a:avLst/>
+          </a:prstGeom>
+          <a:noFill/>
+          <a:ln>
+            <a:noFill/>
+          </a:ln>
+        </p:spPr>
+        <p:txBody>
+          <a:bodyPr spcFirstLastPara="1" wrap="square" lIns="0" tIns="0" rIns="0" bIns="0" anchor="t" anchorCtr="0">
+            <a:noAutofit/>
+          </a:bodyPr>
+          <a:lstStyle>
+            <a:defPPr marR="0" lvl="0" algn="l" rtl="0">
+              <a:lnSpc>
+                <a:spcPct val="100000"/>
+              </a:lnSpc>
+              <a:spcBef>
+                <a:spcPts val="0"/>
+              </a:spcBef>
+              <a:spcAft>
+                <a:spcPts val="0"/>
+              </a:spcAft>
+            </a:defPPr>
+            <a:lvl1pPr marR="0" lvl="0" algn="l" rtl="0">
+              <a:lnSpc>
+                <a:spcPct val="90000"/>
+              </a:lnSpc>
+              <a:spcBef>
+                <a:spcPts val="0"/>
+              </a:spcBef>
+              <a:spcAft>
+                <a:spcPts val="0"/>
+              </a:spcAft>
+              <a:buClr>
+                <a:schemeClr val="dk1"/>
+              </a:buClr>
+              <a:buSzPts val="2400"/>
+              <a:buFont typeface="Arial"/>
+              <a:buNone/>
+              <a:defRPr sz="2400" b="0" i="0" u="none" strike="noStrike" cap="none">
+                <a:solidFill>
+                  <a:schemeClr val="dk1"/>
+                </a:solidFill>
+                <a:latin typeface="Arial"/>
+                <a:ea typeface="Arial"/>
+                <a:cs typeface="Arial"/>
+                <a:sym typeface="Arial"/>
+              </a:defRPr>
+            </a:lvl1pPr>
+            <a:lvl2pPr marR="0" lvl="1" algn="l" rtl="0">
+              <a:lnSpc>
+                <a:spcPct val="100000"/>
+              </a:lnSpc>
+              <a:spcBef>
+                <a:spcPts val="0"/>
+              </a:spcBef>
+              <a:spcAft>
+                <a:spcPts val="0"/>
+              </a:spcAft>
+              <a:buClr>
+                <a:srgbClr val="000000"/>
+              </a:buClr>
+              <a:buSzPts val="1400"/>
+              <a:buFont typeface="Arial"/>
+              <a:buNone/>
+              <a:defRPr sz="1800" b="0" i="0" u="none" strike="noStrike" cap="none">
+                <a:solidFill>
+                  <a:srgbClr val="000000"/>
+                </a:solidFill>
+                <a:latin typeface="Arial"/>
+                <a:ea typeface="Arial"/>
+                <a:cs typeface="Arial"/>
+                <a:sym typeface="Arial"/>
+              </a:defRPr>
+            </a:lvl2pPr>
+            <a:lvl3pPr marR="0" lvl="2" algn="l" rtl="0">
+              <a:lnSpc>
+                <a:spcPct val="100000"/>
+              </a:lnSpc>
+              <a:spcBef>
+                <a:spcPts val="0"/>
+              </a:spcBef>
+              <a:spcAft>
+                <a:spcPts val="0"/>
+              </a:spcAft>
+              <a:buClr>
+                <a:srgbClr val="000000"/>
+              </a:buClr>
+              <a:buSzPts val="1400"/>
+              <a:buFont typeface="Arial"/>
+              <a:buNone/>
+              <a:defRPr sz="1800" b="0" i="0" u="none" strike="noStrike" cap="none">
+                <a:solidFill>
+                  <a:srgbClr val="000000"/>
+                </a:solidFill>
+                <a:latin typeface="Arial"/>
+                <a:ea typeface="Arial"/>
+                <a:cs typeface="Arial"/>
+                <a:sym typeface="Arial"/>
+              </a:defRPr>
+            </a:lvl3pPr>
+            <a:lvl4pPr marR="0" lvl="3" algn="l" rtl="0">
+              <a:lnSpc>
+                <a:spcPct val="100000"/>
+              </a:lnSpc>
+              <a:spcBef>
+                <a:spcPts val="0"/>
+              </a:spcBef>
+              <a:spcAft>
+                <a:spcPts val="0"/>
+              </a:spcAft>
+              <a:buClr>
+                <a:srgbClr val="000000"/>
+              </a:buClr>
+              <a:buSzPts val="1400"/>
+              <a:buFont typeface="Arial"/>
+              <a:buNone/>
+              <a:defRPr sz="1800" b="0" i="0" u="none" strike="noStrike" cap="none">
+                <a:solidFill>
+                  <a:srgbClr val="000000"/>
+                </a:solidFill>
+                <a:latin typeface="Arial"/>
+                <a:ea typeface="Arial"/>
+                <a:cs typeface="Arial"/>
+                <a:sym typeface="Arial"/>
+              </a:defRPr>
+            </a:lvl4pPr>
+            <a:lvl5pPr marR="0" lvl="4" algn="l" rtl="0">
+              <a:lnSpc>
+                <a:spcPct val="100000"/>
+              </a:lnSpc>
+              <a:spcBef>
+                <a:spcPts val="0"/>
+              </a:spcBef>
+              <a:spcAft>
+                <a:spcPts val="0"/>
+              </a:spcAft>
+              <a:buClr>
+                <a:srgbClr val="000000"/>
+              </a:buClr>
+              <a:buSzPts val="1400"/>
+              <a:buFont typeface="Arial"/>
+              <a:buNone/>
+              <a:defRPr sz="1800" b="0" i="0" u="none" strike="noStrike" cap="none">
+                <a:solidFill>
+                  <a:srgbClr val="000000"/>
+                </a:solidFill>
+                <a:latin typeface="Arial"/>
+                <a:ea typeface="Arial"/>
+                <a:cs typeface="Arial"/>
+                <a:sym typeface="Arial"/>
+              </a:defRPr>
+            </a:lvl5pPr>
+            <a:lvl6pPr marR="0" lvl="5" algn="l" rtl="0">
+              <a:lnSpc>
+                <a:spcPct val="100000"/>
+              </a:lnSpc>
+              <a:spcBef>
+                <a:spcPts val="0"/>
+              </a:spcBef>
+              <a:spcAft>
+                <a:spcPts val="0"/>
+              </a:spcAft>
+              <a:buClr>
+                <a:srgbClr val="000000"/>
+              </a:buClr>
+              <a:buSzPts val="1400"/>
+              <a:buFont typeface="Arial"/>
+              <a:buNone/>
+              <a:defRPr sz="1800" b="0" i="0" u="none" strike="noStrike" cap="none">
+                <a:solidFill>
+                  <a:srgbClr val="000000"/>
+                </a:solidFill>
+                <a:latin typeface="Arial"/>
+                <a:ea typeface="Arial"/>
+                <a:cs typeface="Arial"/>
+                <a:sym typeface="Arial"/>
+              </a:defRPr>
+            </a:lvl6pPr>
+            <a:lvl7pPr marR="0" lvl="6" algn="l" rtl="0">
+              <a:lnSpc>
+                <a:spcPct val="100000"/>
+              </a:lnSpc>
+              <a:spcBef>
+                <a:spcPts val="0"/>
+              </a:spcBef>
+              <a:spcAft>
+                <a:spcPts val="0"/>
+              </a:spcAft>
+              <a:buClr>
+                <a:srgbClr val="000000"/>
+              </a:buClr>
+              <a:buSzPts val="1400"/>
+              <a:buFont typeface="Arial"/>
+              <a:buNone/>
+              <a:defRPr sz="1800" b="0" i="0" u="none" strike="noStrike" cap="none">
+                <a:solidFill>
+                  <a:srgbClr val="000000"/>
+                </a:solidFill>
+                <a:latin typeface="Arial"/>
+                <a:ea typeface="Arial"/>
+                <a:cs typeface="Arial"/>
+                <a:sym typeface="Arial"/>
+              </a:defRPr>
+            </a:lvl7pPr>
+            <a:lvl8pPr marR="0" lvl="7" algn="l" rtl="0">
+              <a:lnSpc>
+                <a:spcPct val="100000"/>
+              </a:lnSpc>
+              <a:spcBef>
+                <a:spcPts val="0"/>
+              </a:spcBef>
+              <a:spcAft>
+                <a:spcPts val="0"/>
+              </a:spcAft>
+              <a:buClr>
+                <a:srgbClr val="000000"/>
+              </a:buClr>
+              <a:buSzPts val="1400"/>
+              <a:buFont typeface="Arial"/>
+              <a:buNone/>
+              <a:defRPr sz="1800" b="0" i="0" u="none" strike="noStrike" cap="none">
+                <a:solidFill>
+                  <a:srgbClr val="000000"/>
+                </a:solidFill>
+                <a:latin typeface="Arial"/>
+                <a:ea typeface="Arial"/>
+                <a:cs typeface="Arial"/>
+                <a:sym typeface="Arial"/>
+              </a:defRPr>
+            </a:lvl8pPr>
+            <a:lvl9pPr marR="0" lvl="8" algn="l" rtl="0">
+              <a:lnSpc>
+                <a:spcPct val="100000"/>
+              </a:lnSpc>
+              <a:spcBef>
+                <a:spcPts val="0"/>
+              </a:spcBef>
+              <a:spcAft>
+                <a:spcPts val="0"/>
+              </a:spcAft>
+              <a:buClr>
+                <a:srgbClr val="000000"/>
+              </a:buClr>
+              <a:buSzPts val="1400"/>
+              <a:buFont typeface="Arial"/>
+              <a:buNone/>
+              <a:defRPr sz="1800" b="0" i="0" u="none" strike="noStrike" cap="none">
+                <a:solidFill>
+                  <a:srgbClr val="000000"/>
+                </a:solidFill>
+                <a:latin typeface="Arial"/>
+                <a:ea typeface="Arial"/>
+                <a:cs typeface="Arial"/>
+                <a:sym typeface="Arial"/>
+              </a:defRPr>
+            </a:lvl9pPr>
+          </a:lstStyle>
+          <a:p>
+            <a:r>
+              <a:rPr lang="en-US" dirty="0"/>
+              <a:t>Functions with multiple returns practical</a:t>
+            </a:r>
+          </a:p>
+        </p:txBody>
+      </p:sp>
+    </p:spTree>
+    <p:extLst>
+      <p:ext uri="{BB962C8B-B14F-4D97-AF65-F5344CB8AC3E}">
+        <p14:creationId xmlns:p14="http://schemas.microsoft.com/office/powerpoint/2010/main" val="2531921935"/>
+      </p:ext>
+    </p:extLst>
+  </p:cSld>
+  <p:clrMapOvr>
+    <a:masterClrMapping/>
+  </p:clrMapOvr>
+  <p:timing>
+    <p:tnLst>
+      <p:par>
+        <p:cTn id="1" dur="indefinite" restart="never" nodeType="tmRoot">
+          <p:childTnLst>
+            <p:seq concurrent="1" nextAc="seek">
+              <p:cTn id="2" dur="indefinite" nodeType="mainSeq">
+                <p:childTnLst>
+                  <p:par>
+                    <p:cTn id="3" fill="hold">
+                      <p:stCondLst>
+                        <p:cond delay="indefinite"/>
+                      </p:stCondLst>
+                      <p:childTnLst>
+                        <p:par>
+                          <p:cTn id="4" fill="hold">
+                            <p:stCondLst>
+                              <p:cond delay="0"/>
+                            </p:stCondLst>
+                            <p:childTnLst>
+                              <p:par>
+                                <p:cTn id="5" presetID="1" presetClass="entr" presetSubtype="0" fill="hold" grpId="0" nodeType="clickEffect">
+                                  <p:stCondLst>
+                                    <p:cond delay="0"/>
+                                  </p:stCondLst>
+                                  <p:childTnLst>
+                                    <p:set>
+                                      <p:cBhvr>
+                                        <p:cTn id="6" dur="1" fill="hold">
+                                          <p:stCondLst>
+                                            <p:cond delay="0"/>
+                                          </p:stCondLst>
+                                        </p:cTn>
+                                        <p:tgtEl>
+                                          <p:spTgt spid="3"/>
+                                        </p:tgtEl>
+                                        <p:attrNameLst>
+                                          <p:attrName>style.visibility</p:attrName>
+                                        </p:attrNameLst>
+                                      </p:cBhvr>
+                                      <p:to>
+                                        <p:strVal val="visible"/>
+                                      </p:to>
+                                    </p:set>
+                                  </p:childTnLst>
+                                </p:cTn>
+                              </p:par>
+                            </p:childTnLst>
+                          </p:cTn>
+                        </p:par>
+                      </p:childTnLst>
+                    </p:cTn>
+                  </p:par>
+                </p:childTnLst>
+              </p:cTn>
+              <p:prevCondLst>
+                <p:cond evt="onPrev" delay="0">
+                  <p:tgtEl>
+                    <p:sldTgt/>
+                  </p:tgtEl>
+                </p:cond>
+              </p:prevCondLst>
+              <p:nextCondLst>
+                <p:cond evt="onNext" delay="0">
+                  <p:tgtEl>
+                    <p:sldTgt/>
+                  </p:tgtEl>
+                </p:cond>
+              </p:nextCondLst>
+            </p:seq>
+          </p:childTnLst>
+        </p:cTn>
+      </p:par>
+    </p:tnLst>
+    <p:bldLst>
+      <p:bldP spid="3" grpId="0"/>
+    </p:bldLst>
+  </p:timing>
+</p:sld>
+</file>
+
+<file path=ppt/slides/slide26.xml><?xml version="1.0" encoding="utf-8"?>
+<p:sld xmlns:a="http://schemas.openxmlformats.org/drawingml/2006/main" xmlns:r="http://schemas.openxmlformats.org/officeDocument/2006/relationships" xmlns:p="http://schemas.openxmlformats.org/presentationml/2006/main">
+  <p:cSld>
+    <p:spTree>
+      <p:nvGrpSpPr>
         <p:cNvPr id="1" name=""/>
         <p:cNvGrpSpPr/>
         <p:nvPr/>
